--- a/folien/03-routing-vlan-sicherheit.pptx
+++ b/folien/03-routing-vlan-sicherheit.pptx
@@ -3102,7 +3102,7 @@
       </p:grpSpPr>
       <p:pic>
         <p:nvPicPr>
-          <p:cNvPr id="2" name="Image 0" descr="/Users/jacobmenge/Desktop/kurs-unterlagen/folien/assets/icons/cloudhelden.png">    </p:cNvPr>
+          <p:cNvPr id="2" name="Image 0" descr="/Users/jacobmenge/Desktop/kurs-26.2b-orga/folienwerkstatt/assets/icons/cloudhelden.png">    </p:cNvPr>
           <p:cNvPicPr>
             <a:picLocks noChangeAspect="1"/>
           </p:cNvPicPr>
@@ -7978,7 +7978,7 @@
       </p:sp>
       <p:pic>
         <p:nvPicPr>
-          <p:cNvPr id="5" name="Image 0" descr="/Users/jacobmenge/Desktop/kurs-unterlagen/folien/assets/diagramme/weg-github-0.png">    </p:cNvPr>
+          <p:cNvPr id="5" name="Image 0" descr="/Users/jacobmenge/Desktop/kurs-26.2b-orga/folienwerkstatt/assets/diagramme/weg-github-0.png">    </p:cNvPr>
           <p:cNvPicPr>
             <a:picLocks noChangeAspect="1"/>
           </p:cNvPicPr>
@@ -8233,7 +8233,7 @@
       </p:sp>
       <p:pic>
         <p:nvPicPr>
-          <p:cNvPr id="5" name="Image 0" descr="/Users/jacobmenge/Desktop/kurs-unterlagen/folien/assets/diagramme/weg-github-1.png">    </p:cNvPr>
+          <p:cNvPr id="5" name="Image 0" descr="/Users/jacobmenge/Desktop/kurs-26.2b-orga/folienwerkstatt/assets/diagramme/weg-github-1.png">    </p:cNvPr>
           <p:cNvPicPr>
             <a:picLocks noChangeAspect="1"/>
           </p:cNvPicPr>
@@ -9658,7 +9658,7 @@
       </p:sp>
       <p:pic>
         <p:nvPicPr>
-          <p:cNvPr id="5" name="Image 0" descr="/Users/jacobmenge/Desktop/kurs-unterlagen/folien/assets/diagramme/weg-github-2.png">    </p:cNvPr>
+          <p:cNvPr id="5" name="Image 0" descr="/Users/jacobmenge/Desktop/kurs-26.2b-orga/folienwerkstatt/assets/diagramme/weg-github-2.png">    </p:cNvPr>
           <p:cNvPicPr>
             <a:picLocks noChangeAspect="1"/>
           </p:cNvPicPr>
@@ -9913,7 +9913,7 @@
       </p:sp>
       <p:pic>
         <p:nvPicPr>
-          <p:cNvPr id="5" name="Image 0" descr="/Users/jacobmenge/Desktop/kurs-unterlagen/folien/assets/diagramme/weg-github-3.png">    </p:cNvPr>
+          <p:cNvPr id="5" name="Image 0" descr="/Users/jacobmenge/Desktop/kurs-26.2b-orga/folienwerkstatt/assets/diagramme/weg-github-3.png">    </p:cNvPr>
           <p:cNvPicPr>
             <a:picLocks noChangeAspect="1"/>
           </p:cNvPicPr>
@@ -10168,7 +10168,7 @@
       </p:sp>
       <p:pic>
         <p:nvPicPr>
-          <p:cNvPr id="5" name="Image 0" descr="/Users/jacobmenge/Desktop/kurs-unterlagen/folien/assets/diagramme/weg-github-4.png">    </p:cNvPr>
+          <p:cNvPr id="5" name="Image 0" descr="/Users/jacobmenge/Desktop/kurs-26.2b-orga/folienwerkstatt/assets/diagramme/weg-github-4.png">    </p:cNvPr>
           <p:cNvPicPr>
             <a:picLocks noChangeAspect="1"/>
           </p:cNvPicPr>
@@ -10423,7 +10423,7 @@
       </p:sp>
       <p:pic>
         <p:nvPicPr>
-          <p:cNvPr id="5" name="Image 0" descr="/Users/jacobmenge/Desktop/kurs-unterlagen/folien/assets/diagramme/weg-github-5.png">    </p:cNvPr>
+          <p:cNvPr id="5" name="Image 0" descr="/Users/jacobmenge/Desktop/kurs-26.2b-orga/folienwerkstatt/assets/diagramme/weg-github-5.png">    </p:cNvPr>
           <p:cNvPicPr>
             <a:picLocks noChangeAspect="1"/>
           </p:cNvPicPr>
@@ -13237,7 +13237,7 @@
       </p:sp>
       <p:pic>
         <p:nvPicPr>
-          <p:cNvPr id="5" name="Image 0" descr="/Users/jacobmenge/Desktop/kurs-unterlagen/folien/assets/diagramme/routing-weg.png">    </p:cNvPr>
+          <p:cNvPr id="5" name="Image 0" descr="/Users/jacobmenge/Desktop/kurs-26.2b-orga/folienwerkstatt/assets/diagramme/routing-weg.png">    </p:cNvPr>
           <p:cNvPicPr>
             <a:picLocks noChangeAspect="1"/>
           </p:cNvPicPr>
@@ -13783,7 +13783,7 @@
       </p:sp>
       <p:pic>
         <p:nvPicPr>
-          <p:cNvPr id="5" name="Image 0" descr="/Users/jacobmenge/Desktop/kurs-unterlagen/folien/assets/diagramme/vlan-switch.png">    </p:cNvPr>
+          <p:cNvPr id="5" name="Image 0" descr="/Users/jacobmenge/Desktop/kurs-26.2b-orga/folienwerkstatt/assets/diagramme/vlan-switch.png">    </p:cNvPr>
           <p:cNvPicPr>
             <a:picLocks noChangeAspect="1"/>
           </p:cNvPicPr>
@@ -14097,7 +14097,7 @@
       </p:sp>
       <p:pic>
         <p:nvPicPr>
-          <p:cNvPr id="5" name="Image 0" descr="/Users/jacobmenge/Desktop/kurs-unterlagen/folien/assets/diagramme/zonen-modell.png">    </p:cNvPr>
+          <p:cNvPr id="5" name="Image 0" descr="/Users/jacobmenge/Desktop/kurs-26.2b-orga/folienwerkstatt/assets/diagramme/zonen-modell.png">    </p:cNvPr>
           <p:cNvPicPr>
             <a:picLocks noChangeAspect="1"/>
           </p:cNvPicPr>

--- a/folien/03-routing-vlan-sicherheit.pptx
+++ b/folien/03-routing-vlan-sicherheit.pptx
@@ -41,10 +41,9 @@
     <p:sldId id="289" r:id="rId35"/>
     <p:sldId id="290" r:id="rId36"/>
     <p:sldId id="291" r:id="rId37"/>
-    <p:sldId id="292" r:id="rId38"/>
   </p:sldIdLst>
   <p:notesMasterIdLst>
-    <p:notesMasterId r:id="rId39"/>
+    <p:notesMasterId r:id="rId38"/>
   </p:notesMasterIdLst>
   <p:sldSz cx="9144000" cy="5143500"/>
   <p:notesSz cx="5143500" cy="9144000"/>
@@ -3114,94 +3113,6 @@
             <a:fld id="{F7021451-1387-4CA6-816F-3879F97B5CBC}" type="slidenum">
               <a:rPr lang="en-US"/>
               <a:t>36</a:t>
-            </a:fld>
-            <a:endParaRPr lang="en-US"/>
-          </a:p>
-        </p:txBody>
-      </p:sp>
-    </p:spTree>
-    <p:extLst>
-      <p:ext uri="{BB962C8B-B14F-4D97-AF65-F5344CB8AC3E}">
-        <p14:creationId xmlns:p14="http://schemas.microsoft.com/office/powerpoint/2010/main" val="1024086991"/>
-      </p:ext>
-    </p:extLst>
-  </p:cSld>
-  <p:clrMapOvr>
-    <a:masterClrMapping/>
-  </p:clrMapOvr>
-</p:notes>
-</file>
-
-<file path=ppt/notesSlides/notesSlide37.xml><?xml version="1.0" encoding="utf-8"?>
-<p:notes xmlns:a="http://schemas.openxmlformats.org/drawingml/2006/main" xmlns:r="http://schemas.openxmlformats.org/officeDocument/2006/relationships" xmlns:p="http://schemas.openxmlformats.org/presentationml/2006/main">
-  <p:cSld>
-    <p:spTree>
-      <p:nvGrpSpPr>
-        <p:cNvPr id="1" name=""/>
-        <p:cNvGrpSpPr/>
-        <p:nvPr/>
-      </p:nvGrpSpPr>
-      <p:grpSpPr>
-        <a:xfrm>
-          <a:off x="0" y="0"/>
-          <a:ext cx="0" cy="0"/>
-          <a:chOff x="0" y="0"/>
-          <a:chExt cx="0" cy="0"/>
-        </a:xfrm>
-      </p:grpSpPr>
-      <p:sp>
-        <p:nvSpPr>
-          <p:cNvPr id="2" name="Slide Image Placeholder 1"/>
-          <p:cNvSpPr>
-            <a:spLocks noGrp="1" noRot="1" noChangeAspect="1"/>
-          </p:cNvSpPr>
-          <p:nvPr>
-            <p:ph type="sldImg"/>
-          </p:nvPr>
-        </p:nvSpPr>
-        <p:spPr/>
-      </p:sp>
-      <p:sp>
-        <p:nvSpPr>
-          <p:cNvPr id="3" name="Notes Placeholder 2"/>
-          <p:cNvSpPr>
-            <a:spLocks noGrp="1"/>
-          </p:cNvSpPr>
-          <p:nvPr>
-            <p:ph type="body" idx="1"/>
-          </p:nvPr>
-        </p:nvSpPr>
-        <p:spPr/>
-        <p:txBody>
-          <a:bodyPr/>
-          <a:lstStyle/>
-          <a:p>
-            <a:r>
-              <a:rPr lang="en-US" dirty="0"/>
-              <a:t/>
-            </a:r>
-            <a:endParaRPr lang="en-US" dirty="0"/>
-          </a:p>
-        </p:txBody>
-      </p:sp>
-      <p:sp>
-        <p:nvSpPr>
-          <p:cNvPr id="4" name="Slide Number Placeholder 3"/>
-          <p:cNvSpPr>
-            <a:spLocks noGrp="1"/>
-          </p:cNvSpPr>
-          <p:nvPr>
-            <p:ph type="sldNum" sz="quarter" idx="10"/>
-          </p:nvPr>
-        </p:nvSpPr>
-        <p:spPr/>
-        <p:txBody>
-          <a:bodyPr/>
-          <a:lstStyle/>
-          <a:p>
-            <a:fld id="{F7021451-1387-4CA6-816F-3879F97B5CBC}" type="slidenum">
-              <a:rPr lang="en-US"/>
-              <a:t>37</a:t>
             </a:fld>
             <a:endParaRPr lang="en-US"/>
           </a:p>
@@ -4610,7 +4521,7 @@
                 <a:ea typeface="Arial" pitchFamily="34" charset="-122"/>
                 <a:cs typeface="Arial" pitchFamily="34" charset="-120"/>
               </a:rPr>
-              <a:t>8/31</a:t>
+              <a:t>8/30</a:t>
             </a:r>
             <a:endParaRPr lang="en-US" sz="1050" dirty="0"/>
           </a:p>
@@ -4924,7 +4835,7 @@
                 <a:ea typeface="Arial" pitchFamily="34" charset="-122"/>
                 <a:cs typeface="Arial" pitchFamily="34" charset="-120"/>
               </a:rPr>
-              <a:t>9/31</a:t>
+              <a:t>9/30</a:t>
             </a:r>
             <a:endParaRPr lang="en-US" sz="1050" dirty="0"/>
           </a:p>
@@ -5238,7 +5149,7 @@
                 <a:ea typeface="Arial" pitchFamily="34" charset="-122"/>
                 <a:cs typeface="Arial" pitchFamily="34" charset="-120"/>
               </a:rPr>
-              <a:t>10/31</a:t>
+              <a:t>10/30</a:t>
             </a:r>
             <a:endParaRPr lang="en-US" sz="1050" dirty="0"/>
           </a:p>
@@ -5552,7 +5463,7 @@
                 <a:ea typeface="Arial" pitchFamily="34" charset="-122"/>
                 <a:cs typeface="Arial" pitchFamily="34" charset="-120"/>
               </a:rPr>
-              <a:t>11/31</a:t>
+              <a:t>11/30</a:t>
             </a:r>
             <a:endParaRPr lang="en-US" sz="1050" dirty="0"/>
           </a:p>
@@ -5866,7 +5777,7 @@
                 <a:ea typeface="Arial" pitchFamily="34" charset="-122"/>
                 <a:cs typeface="Arial" pitchFamily="34" charset="-120"/>
               </a:rPr>
-              <a:t>12/31</a:t>
+              <a:t>12/30</a:t>
             </a:r>
             <a:endParaRPr lang="en-US" sz="1050" dirty="0"/>
           </a:p>
@@ -6180,7 +6091,7 @@
                 <a:ea typeface="Arial" pitchFamily="34" charset="-122"/>
                 <a:cs typeface="Arial" pitchFamily="34" charset="-120"/>
               </a:rPr>
-              <a:t>13/31</a:t>
+              <a:t>13/30</a:t>
             </a:r>
             <a:endParaRPr lang="en-US" sz="1050" dirty="0"/>
           </a:p>
@@ -6703,7 +6614,7 @@
                 <a:ea typeface="Arial" pitchFamily="34" charset="-122"/>
                 <a:cs typeface="Arial" pitchFamily="34" charset="-120"/>
               </a:rPr>
-              <a:t>14/31</a:t>
+              <a:t>14/30</a:t>
             </a:r>
             <a:endParaRPr lang="en-US" sz="1050" dirty="0"/>
           </a:p>
@@ -7017,7 +6928,7 @@
                 <a:ea typeface="Arial" pitchFamily="34" charset="-122"/>
                 <a:cs typeface="Arial" pitchFamily="34" charset="-120"/>
               </a:rPr>
-              <a:t>15/31</a:t>
+              <a:t>15/30</a:t>
             </a:r>
             <a:endParaRPr lang="en-US" sz="1050" dirty="0"/>
           </a:p>
@@ -7363,7 +7274,7 @@
                 <a:ea typeface="Arial" pitchFamily="34" charset="-122"/>
                 <a:cs typeface="Arial" pitchFamily="34" charset="-120"/>
               </a:rPr>
-              <a:t>16/31</a:t>
+              <a:t>16/30</a:t>
             </a:r>
             <a:endParaRPr lang="en-US" sz="1050" dirty="0"/>
           </a:p>
@@ -8533,7 +8444,7 @@
                 <a:ea typeface="Arial" pitchFamily="34" charset="-122"/>
                 <a:cs typeface="Arial" pitchFamily="34" charset="-120"/>
               </a:rPr>
-              <a:t>1/31</a:t>
+              <a:t>1/30</a:t>
             </a:r>
             <a:endParaRPr lang="en-US" sz="1050" dirty="0"/>
           </a:p>
@@ -8847,7 +8758,7 @@
                 <a:ea typeface="Arial" pitchFamily="34" charset="-122"/>
                 <a:cs typeface="Arial" pitchFamily="34" charset="-120"/>
               </a:rPr>
-              <a:t>17/31</a:t>
+              <a:t>17/30</a:t>
             </a:r>
             <a:endParaRPr lang="en-US" sz="1050" dirty="0"/>
           </a:p>
@@ -9193,7 +9104,7 @@
                 <a:ea typeface="Arial" pitchFamily="34" charset="-122"/>
                 <a:cs typeface="Arial" pitchFamily="34" charset="-120"/>
               </a:rPr>
-              <a:t>18/31</a:t>
+              <a:t>18/30</a:t>
             </a:r>
             <a:endParaRPr lang="en-US" sz="1050" dirty="0"/>
           </a:p>
@@ -9507,7 +9418,7 @@
                 <a:ea typeface="Arial" pitchFamily="34" charset="-122"/>
                 <a:cs typeface="Arial" pitchFamily="34" charset="-120"/>
               </a:rPr>
-              <a:t>19/31</a:t>
+              <a:t>19/30</a:t>
             </a:r>
             <a:endParaRPr lang="en-US" sz="1050" dirty="0"/>
           </a:p>
@@ -10661,7 +10572,7 @@
                 <a:ea typeface="Arial" pitchFamily="34" charset="-122"/>
                 <a:cs typeface="Arial" pitchFamily="34" charset="-120"/>
               </a:rPr>
-              <a:t>20/31</a:t>
+              <a:t>20/30</a:t>
             </a:r>
             <a:endParaRPr lang="en-US" sz="1050" dirty="0"/>
           </a:p>
@@ -11235,7 +11146,7 @@
                 <a:ea typeface="Arial" pitchFamily="34" charset="-122"/>
                 <a:cs typeface="Arial" pitchFamily="34" charset="-120"/>
               </a:rPr>
-              <a:t>21/31</a:t>
+              <a:t>21/30</a:t>
             </a:r>
             <a:endParaRPr lang="en-US" sz="1050" dirty="0"/>
           </a:p>
@@ -11900,7 +11811,7 @@
                 <a:ea typeface="Arial" pitchFamily="34" charset="-122"/>
                 <a:cs typeface="Arial" pitchFamily="34" charset="-120"/>
               </a:rPr>
-              <a:t>22/31</a:t>
+              <a:t>22/30</a:t>
             </a:r>
             <a:endParaRPr lang="en-US" sz="1050" dirty="0"/>
           </a:p>
@@ -12718,7 +12629,7 @@
                 <a:ea typeface="Arial" pitchFamily="34" charset="-122"/>
                 <a:cs typeface="Arial" pitchFamily="34" charset="-120"/>
               </a:rPr>
-              <a:t>23/31</a:t>
+              <a:t>23/30</a:t>
             </a:r>
             <a:endParaRPr lang="en-US" sz="1050" dirty="0"/>
           </a:p>
@@ -13079,8 +12990,8 @@
         </p:blipFill>
         <p:spPr>
           <a:xfrm>
-            <a:off x="566928" y="1600200"/>
-            <a:ext cx="8010144" cy="2286000"/>
+            <a:off x="566928" y="1572768"/>
+            <a:ext cx="8010144" cy="2340864"/>
           </a:xfrm>
           <a:prstGeom prst="rect">
             <a:avLst/>
@@ -13182,7 +13093,7 @@
                 <a:ea typeface="Arial" pitchFamily="34" charset="-122"/>
                 <a:cs typeface="Arial" pitchFamily="34" charset="-120"/>
               </a:rPr>
-              <a:t>24/31</a:t>
+              <a:t>24/30</a:t>
             </a:r>
             <a:endParaRPr lang="en-US" sz="1050" dirty="0"/>
           </a:p>
@@ -13528,7 +13439,7 @@
                 <a:ea typeface="Arial" pitchFamily="34" charset="-122"/>
                 <a:cs typeface="Arial" pitchFamily="34" charset="-120"/>
               </a:rPr>
-              <a:t>2/31</a:t>
+              <a:t>2/30</a:t>
             </a:r>
             <a:endParaRPr lang="en-US" sz="1050" dirty="0"/>
           </a:p>
@@ -13619,7 +13530,7 @@
                 <a:ea typeface="Arial" pitchFamily="34" charset="-122"/>
                 <a:cs typeface="Arial" pitchFamily="34" charset="-120"/>
               </a:rPr>
-              <a:t>STATION 1 VON 5</a:t>
+              <a:t>STATION 1 VON 4</a:t>
             </a:r>
             <a:endParaRPr lang="en-US" sz="1150" dirty="0"/>
           </a:p>
@@ -13680,8 +13591,8 @@
         </p:blipFill>
         <p:spPr>
           <a:xfrm>
-            <a:off x="566928" y="1600200"/>
-            <a:ext cx="8010144" cy="2286000"/>
+            <a:off x="566928" y="1572768"/>
+            <a:ext cx="8010144" cy="2340864"/>
           </a:xfrm>
           <a:prstGeom prst="rect">
             <a:avLst/>
@@ -13783,7 +13694,7 @@
                 <a:ea typeface="Arial" pitchFamily="34" charset="-122"/>
                 <a:cs typeface="Arial" pitchFamily="34" charset="-120"/>
               </a:rPr>
-              <a:t>25/31</a:t>
+              <a:t>25/30</a:t>
             </a:r>
             <a:endParaRPr lang="en-US" sz="1050" dirty="0"/>
           </a:p>
@@ -13874,7 +13785,7 @@
                 <a:ea typeface="Arial" pitchFamily="34" charset="-122"/>
                 <a:cs typeface="Arial" pitchFamily="34" charset="-120"/>
               </a:rPr>
-              <a:t>STATION 2 VON 5</a:t>
+              <a:t>STATION 2 VON 4</a:t>
             </a:r>
             <a:endParaRPr lang="en-US" sz="1150" dirty="0"/>
           </a:p>
@@ -13935,8 +13846,8 @@
         </p:blipFill>
         <p:spPr>
           <a:xfrm>
-            <a:off x="566928" y="1600200"/>
-            <a:ext cx="8010144" cy="2286000"/>
+            <a:off x="566928" y="1572768"/>
+            <a:ext cx="8010144" cy="2340864"/>
           </a:xfrm>
           <a:prstGeom prst="rect">
             <a:avLst/>
@@ -14038,7 +13949,7 @@
                 <a:ea typeface="Arial" pitchFamily="34" charset="-122"/>
                 <a:cs typeface="Arial" pitchFamily="34" charset="-120"/>
               </a:rPr>
-              <a:t>26/31</a:t>
+              <a:t>26/30</a:t>
             </a:r>
             <a:endParaRPr lang="en-US" sz="1050" dirty="0"/>
           </a:p>
@@ -14129,7 +14040,7 @@
                 <a:ea typeface="Arial" pitchFamily="34" charset="-122"/>
                 <a:cs typeface="Arial" pitchFamily="34" charset="-120"/>
               </a:rPr>
-              <a:t>STATION 3 VON 5</a:t>
+              <a:t>STATION 3 VON 4</a:t>
             </a:r>
             <a:endParaRPr lang="en-US" sz="1150" dirty="0"/>
           </a:p>
@@ -14190,8 +14101,8 @@
         </p:blipFill>
         <p:spPr>
           <a:xfrm>
-            <a:off x="566928" y="1600200"/>
-            <a:ext cx="8010144" cy="2286000"/>
+            <a:off x="566928" y="1572768"/>
+            <a:ext cx="8010144" cy="2340864"/>
           </a:xfrm>
           <a:prstGeom prst="rect">
             <a:avLst/>
@@ -14293,7 +14204,7 @@
                 <a:ea typeface="Arial" pitchFamily="34" charset="-122"/>
                 <a:cs typeface="Arial" pitchFamily="34" charset="-120"/>
               </a:rPr>
-              <a:t>27/31</a:t>
+              <a:t>27/30</a:t>
             </a:r>
             <a:endParaRPr lang="en-US" sz="1050" dirty="0"/>
           </a:p>
@@ -14384,7 +14295,7 @@
                 <a:ea typeface="Arial" pitchFamily="34" charset="-122"/>
                 <a:cs typeface="Arial" pitchFamily="34" charset="-120"/>
               </a:rPr>
-              <a:t>STATION 4 VON 5</a:t>
+              <a:t>STATION 4 VON 4</a:t>
             </a:r>
             <a:endParaRPr lang="en-US" sz="1150" dirty="0"/>
           </a:p>
@@ -14445,8 +14356,8 @@
         </p:blipFill>
         <p:spPr>
           <a:xfrm>
-            <a:off x="566928" y="1600200"/>
-            <a:ext cx="8010144" cy="2286000"/>
+            <a:off x="566928" y="1572768"/>
+            <a:ext cx="8010144" cy="2340864"/>
           </a:xfrm>
           <a:prstGeom prst="rect">
             <a:avLst/>
@@ -14456,6 +14367,65 @@
       <p:sp>
         <p:nvSpPr>
           <p:cNvPr id="6" name="Shape 3"/>
+          <p:cNvSpPr/>
+          <p:nvPr/>
+        </p:nvSpPr>
+        <p:spPr>
+          <a:xfrm>
+            <a:off x="566928" y="4178808"/>
+            <a:ext cx="32004" cy="256032"/>
+          </a:xfrm>
+          <a:prstGeom prst="rect">
+            <a:avLst/>
+          </a:prstGeom>
+          <a:solidFill>
+            <a:srgbClr val="3843AF"/>
+          </a:solidFill>
+          <a:ln/>
+        </p:spPr>
+      </p:sp>
+      <p:sp>
+        <p:nvSpPr>
+          <p:cNvPr id="7" name="Text 4"/>
+          <p:cNvSpPr/>
+          <p:nvPr/>
+        </p:nvSpPr>
+        <p:spPr>
+          <a:xfrm>
+            <a:off x="749808" y="4133088"/>
+            <a:ext cx="7827264" cy="402336"/>
+          </a:xfrm>
+          <a:prstGeom prst="rect">
+            <a:avLst/>
+          </a:prstGeom>
+          <a:noFill/>
+          <a:ln/>
+        </p:spPr>
+        <p:txBody>
+          <a:bodyPr wrap="square" lIns="0" tIns="0" rIns="0" bIns="0" rtlCol="0" anchor="ctr"/>
+          <a:lstStyle/>
+          <a:p>
+            <a:pPr indent="0" marL="0">
+              <a:buNone/>
+            </a:pPr>
+            <a:r>
+              <a:rPr lang="en-US" sz="1200" b="1" dirty="0">
+                <a:solidFill>
+                  <a:srgbClr val="434A63"/>
+                </a:solidFill>
+                <a:latin typeface="Arial" pitchFamily="34" charset="0"/>
+                <a:ea typeface="Arial" pitchFamily="34" charset="-122"/>
+                <a:cs typeface="Arial" pitchFamily="34" charset="-120"/>
+              </a:rPr>
+              <a:t>Vom ersten Abend bis heute: Modell, Adressen, Weg, Trennung – alles steckt in dieser einen Antwort.</a:t>
+            </a:r>
+            <a:endParaRPr lang="en-US" sz="1200" dirty="0"/>
+          </a:p>
+        </p:txBody>
+      </p:sp>
+      <p:sp>
+        <p:nvSpPr>
+          <p:cNvPr id="8" name="Shape 5"/>
           <p:cNvSpPr/>
           <p:nvPr/>
         </p:nvSpPr>
@@ -14478,7 +14448,7 @@
       </p:sp>
       <p:sp>
         <p:nvSpPr>
-          <p:cNvPr id="7" name="Text 4"/>
+          <p:cNvPr id="9" name="Text 6"/>
           <p:cNvSpPr/>
           <p:nvPr/>
         </p:nvSpPr>
@@ -14517,7 +14487,7 @@
       </p:sp>
       <p:sp>
         <p:nvSpPr>
-          <p:cNvPr id="8" name="Text 5"/>
+          <p:cNvPr id="10" name="Text 7"/>
           <p:cNvSpPr/>
           <p:nvPr/>
         </p:nvSpPr>
@@ -14548,7 +14518,7 @@
                 <a:ea typeface="Arial" pitchFamily="34" charset="-122"/>
                 <a:cs typeface="Arial" pitchFamily="34" charset="-120"/>
               </a:rPr>
-              <a:t>28/31</a:t>
+              <a:t>28/30</a:t>
             </a:r>
             <a:endParaRPr lang="en-US" sz="1050" dirty="0"/>
           </a:p>
@@ -14639,7 +14609,7 @@
                 <a:ea typeface="Arial" pitchFamily="34" charset="-122"/>
                 <a:cs typeface="Arial" pitchFamily="34" charset="-120"/>
               </a:rPr>
-              <a:t>STATION 5 VON 5</a:t>
+              <a:t>DREI ABENDE, EIN WERKZEUGKASTEN</a:t>
             </a:r>
             <a:endParaRPr lang="en-US" sz="1150" dirty="0"/>
           </a:p>
@@ -14678,46 +14648,42 @@
                 <a:ea typeface="Arial" pitchFamily="34" charset="-122"/>
                 <a:cs typeface="Arial" pitchFamily="34" charset="-120"/>
               </a:rPr>
-              <a:t>Die Leitfrage vom ersten Abend</a:t>
+              <a:t>Was der Netzwerkblock euch gegeben hat</a:t>
             </a:r>
             <a:endParaRPr lang="en-US" sz="2600" dirty="0"/>
           </a:p>
         </p:txBody>
       </p:sp>
-      <p:pic>
-        <p:nvPicPr>
-          <p:cNvPr id="5" name="Image 0" descr="/Users/jacobmenge/Desktop/kurs-26.2b-orga/folienwerkstatt/assets/diagramme/weg-github-5.png">    </p:cNvPr>
-          <p:cNvPicPr>
-            <a:picLocks noChangeAspect="1"/>
-          </p:cNvPicPr>
-          <p:nvPr/>
-        </p:nvPicPr>
-        <p:blipFill>
-          <a:blip r:embed="rId1"/>
-          <a:stretch>
-            <a:fillRect/>
-          </a:stretch>
-        </p:blipFill>
-        <p:spPr>
-          <a:xfrm>
-            <a:off x="566928" y="1600200"/>
-            <a:ext cx="8010144" cy="2286000"/>
-          </a:xfrm>
-          <a:prstGeom prst="rect">
-            <a:avLst/>
-          </a:prstGeom>
-        </p:spPr>
-      </p:pic>
-      <p:sp>
-        <p:nvSpPr>
-          <p:cNvPr id="6" name="Shape 3"/>
-          <p:cNvSpPr/>
-          <p:nvPr/>
-        </p:nvSpPr>
-        <p:spPr>
-          <a:xfrm>
-            <a:off x="566928" y="4178808"/>
-            <a:ext cx="32004" cy="256032"/>
+      <p:sp>
+        <p:nvSpPr>
+          <p:cNvPr id="5" name="Shape 3"/>
+          <p:cNvSpPr/>
+          <p:nvPr/>
+        </p:nvSpPr>
+        <p:spPr>
+          <a:xfrm>
+            <a:off x="566928" y="1783080"/>
+            <a:ext cx="2523744" cy="1965960"/>
+          </a:xfrm>
+          <a:prstGeom prst="rect">
+            <a:avLst/>
+          </a:prstGeom>
+          <a:solidFill>
+            <a:srgbClr val="F5F6FC"/>
+          </a:solidFill>
+          <a:ln/>
+        </p:spPr>
+      </p:sp>
+      <p:sp>
+        <p:nvSpPr>
+          <p:cNvPr id="6" name="Shape 4"/>
+          <p:cNvSpPr/>
+          <p:nvPr/>
+        </p:nvSpPr>
+        <p:spPr>
+          <a:xfrm>
+            <a:off x="566928" y="1783080"/>
+            <a:ext cx="41148" cy="1965960"/>
           </a:xfrm>
           <a:prstGeom prst="rect">
             <a:avLst/>
@@ -14730,30 +14696,72 @@
       </p:sp>
       <p:sp>
         <p:nvSpPr>
-          <p:cNvPr id="7" name="Text 4"/>
-          <p:cNvSpPr/>
-          <p:nvPr/>
-        </p:nvSpPr>
-        <p:spPr>
-          <a:xfrm>
-            <a:off x="749808" y="4133088"/>
-            <a:ext cx="7827264" cy="402336"/>
-          </a:xfrm>
-          <a:prstGeom prst="rect">
-            <a:avLst/>
-          </a:prstGeom>
-          <a:noFill/>
-          <a:ln/>
-        </p:spPr>
-        <p:txBody>
-          <a:bodyPr wrap="square" lIns="0" tIns="0" rIns="0" bIns="0" rtlCol="0" anchor="ctr"/>
-          <a:lstStyle/>
-          <a:p>
-            <a:pPr indent="0" marL="0">
-              <a:buNone/>
-            </a:pPr>
-            <a:r>
-              <a:rPr lang="en-US" sz="1200" b="1" dirty="0">
+          <p:cNvPr id="7" name="Text 5"/>
+          <p:cNvSpPr/>
+          <p:nvPr/>
+        </p:nvSpPr>
+        <p:spPr>
+          <a:xfrm>
+            <a:off x="804672" y="1929384"/>
+            <a:ext cx="2121408" cy="256032"/>
+          </a:xfrm>
+          <a:prstGeom prst="rect">
+            <a:avLst/>
+          </a:prstGeom>
+          <a:noFill/>
+          <a:ln/>
+        </p:spPr>
+        <p:txBody>
+          <a:bodyPr wrap="square" lIns="0" tIns="0" rIns="0" bIns="0" rtlCol="0" anchor="t"/>
+          <a:lstStyle/>
+          <a:p>
+            <a:pPr indent="0" marL="0">
+              <a:buNone/>
+            </a:pPr>
+            <a:r>
+              <a:rPr lang="en-US" sz="1300" b="1" dirty="0">
+                <a:solidFill>
+                  <a:srgbClr val="272E52"/>
+                </a:solidFill>
+                <a:latin typeface="Arial" pitchFamily="34" charset="0"/>
+                <a:ea typeface="Arial" pitchFamily="34" charset="-122"/>
+                <a:cs typeface="Arial" pitchFamily="34" charset="-120"/>
+              </a:rPr>
+              <a:t>Ein Raster</a:t>
+            </a:r>
+            <a:endParaRPr lang="en-US" sz="1300" dirty="0"/>
+          </a:p>
+        </p:txBody>
+      </p:sp>
+      <p:sp>
+        <p:nvSpPr>
+          <p:cNvPr id="8" name="Text 6"/>
+          <p:cNvSpPr/>
+          <p:nvPr/>
+        </p:nvSpPr>
+        <p:spPr>
+          <a:xfrm>
+            <a:off x="804672" y="2231136"/>
+            <a:ext cx="2121408" cy="1399032"/>
+          </a:xfrm>
+          <a:prstGeom prst="rect">
+            <a:avLst/>
+          </a:prstGeom>
+          <a:noFill/>
+          <a:ln/>
+        </p:spPr>
+        <p:txBody>
+          <a:bodyPr wrap="square" lIns="0" tIns="0" rIns="0" bIns="0" rtlCol="0" anchor="t"/>
+          <a:lstStyle/>
+          <a:p>
+            <a:pPr indent="0" marL="0">
+              <a:lnSpc>
+                <a:spcPct val="92000"/>
+              </a:lnSpc>
+              <a:buNone/>
+            </a:pPr>
+            <a:r>
+              <a:rPr lang="en-US" sz="1100" dirty="0">
                 <a:solidFill>
                   <a:srgbClr val="434A63"/>
                 </a:solidFill>
@@ -14761,15 +14769,339 @@
                 <a:ea typeface="Arial" pitchFamily="34" charset="-122"/>
                 <a:cs typeface="Arial" pitchFamily="34" charset="-120"/>
               </a:rPr>
-              <a:t>Vom ersten Abend bis heute: Modell, Adressen, Weg, Trennung – alles steckt in dieser einen Antwort.</a:t>
-            </a:r>
-            <a:endParaRPr lang="en-US" sz="1200" dirty="0"/>
-          </a:p>
-        </p:txBody>
-      </p:sp>
-      <p:sp>
-        <p:nvSpPr>
-          <p:cNvPr id="8" name="Shape 5"/>
+              <a:t>Die Schichten als Suchraster: von unten nach oben, jeder Befehl beweist seine Schicht. Heute habt ihr fünf echte Fälle so gelöst.</a:t>
+            </a:r>
+            <a:endParaRPr lang="en-US" sz="1100" dirty="0"/>
+          </a:p>
+        </p:txBody>
+      </p:sp>
+      <p:sp>
+        <p:nvSpPr>
+          <p:cNvPr id="9" name="Shape 7"/>
+          <p:cNvSpPr/>
+          <p:nvPr/>
+        </p:nvSpPr>
+        <p:spPr>
+          <a:xfrm>
+            <a:off x="3310128" y="1783080"/>
+            <a:ext cx="2523744" cy="1965960"/>
+          </a:xfrm>
+          <a:prstGeom prst="rect">
+            <a:avLst/>
+          </a:prstGeom>
+          <a:solidFill>
+            <a:srgbClr val="F5F6FC"/>
+          </a:solidFill>
+          <a:ln/>
+        </p:spPr>
+      </p:sp>
+      <p:sp>
+        <p:nvSpPr>
+          <p:cNvPr id="10" name="Shape 8"/>
+          <p:cNvSpPr/>
+          <p:nvPr/>
+        </p:nvSpPr>
+        <p:spPr>
+          <a:xfrm>
+            <a:off x="3310128" y="1783080"/>
+            <a:ext cx="41148" cy="1965960"/>
+          </a:xfrm>
+          <a:prstGeom prst="rect">
+            <a:avLst/>
+          </a:prstGeom>
+          <a:solidFill>
+            <a:srgbClr val="0F7C86"/>
+          </a:solidFill>
+          <a:ln/>
+        </p:spPr>
+      </p:sp>
+      <p:sp>
+        <p:nvSpPr>
+          <p:cNvPr id="11" name="Text 9"/>
+          <p:cNvSpPr/>
+          <p:nvPr/>
+        </p:nvSpPr>
+        <p:spPr>
+          <a:xfrm>
+            <a:off x="3547872" y="1929384"/>
+            <a:ext cx="2121408" cy="256032"/>
+          </a:xfrm>
+          <a:prstGeom prst="rect">
+            <a:avLst/>
+          </a:prstGeom>
+          <a:noFill/>
+          <a:ln/>
+        </p:spPr>
+        <p:txBody>
+          <a:bodyPr wrap="square" lIns="0" tIns="0" rIns="0" bIns="0" rtlCol="0" anchor="t"/>
+          <a:lstStyle/>
+          <a:p>
+            <a:pPr indent="0" marL="0">
+              <a:buNone/>
+            </a:pPr>
+            <a:r>
+              <a:rPr lang="en-US" sz="1300" b="1" dirty="0">
+                <a:solidFill>
+                  <a:srgbClr val="272E52"/>
+                </a:solidFill>
+                <a:latin typeface="Arial" pitchFamily="34" charset="0"/>
+                <a:ea typeface="Arial" pitchFamily="34" charset="-122"/>
+                <a:cs typeface="Arial" pitchFamily="34" charset="-120"/>
+              </a:rPr>
+              <a:t>Ein Handwerk</a:t>
+            </a:r>
+            <a:endParaRPr lang="en-US" sz="1300" dirty="0"/>
+          </a:p>
+        </p:txBody>
+      </p:sp>
+      <p:sp>
+        <p:nvSpPr>
+          <p:cNvPr id="12" name="Text 10"/>
+          <p:cNvSpPr/>
+          <p:nvPr/>
+        </p:nvSpPr>
+        <p:spPr>
+          <a:xfrm>
+            <a:off x="3547872" y="2231136"/>
+            <a:ext cx="2121408" cy="1399032"/>
+          </a:xfrm>
+          <a:prstGeom prst="rect">
+            <a:avLst/>
+          </a:prstGeom>
+          <a:noFill/>
+          <a:ln/>
+        </p:spPr>
+        <p:txBody>
+          <a:bodyPr wrap="square" lIns="0" tIns="0" rIns="0" bIns="0" rtlCol="0" anchor="t"/>
+          <a:lstStyle/>
+          <a:p>
+            <a:pPr indent="0" marL="0">
+              <a:lnSpc>
+                <a:spcPct val="92000"/>
+              </a:lnSpc>
+              <a:buNone/>
+            </a:pPr>
+            <a:r>
+              <a:rPr lang="en-US" sz="1100" dirty="0">
+                <a:solidFill>
+                  <a:srgbClr val="434A63"/>
+                </a:solidFill>
+                <a:latin typeface="Arial" pitchFamily="34" charset="0"/>
+                <a:ea typeface="Arial" pitchFamily="34" charset="-122"/>
+                <a:cs typeface="Arial" pitchFamily="34" charset="-120"/>
+              </a:rPr>
+              <a:t>Subnetze rechnen und Netze planen – Maske, Blockgröße, minus zwei. Das tragt ihr in jede Infrastruktur, die noch kommt.</a:t>
+            </a:r>
+            <a:endParaRPr lang="en-US" sz="1100" dirty="0"/>
+          </a:p>
+        </p:txBody>
+      </p:sp>
+      <p:sp>
+        <p:nvSpPr>
+          <p:cNvPr id="13" name="Shape 11"/>
+          <p:cNvSpPr/>
+          <p:nvPr/>
+        </p:nvSpPr>
+        <p:spPr>
+          <a:xfrm>
+            <a:off x="6053328" y="1783080"/>
+            <a:ext cx="2523744" cy="1965960"/>
+          </a:xfrm>
+          <a:prstGeom prst="rect">
+            <a:avLst/>
+          </a:prstGeom>
+          <a:solidFill>
+            <a:srgbClr val="F5F6FC"/>
+          </a:solidFill>
+          <a:ln/>
+        </p:spPr>
+      </p:sp>
+      <p:sp>
+        <p:nvSpPr>
+          <p:cNvPr id="14" name="Shape 12"/>
+          <p:cNvSpPr/>
+          <p:nvPr/>
+        </p:nvSpPr>
+        <p:spPr>
+          <a:xfrm>
+            <a:off x="6053328" y="1783080"/>
+            <a:ext cx="41148" cy="1965960"/>
+          </a:xfrm>
+          <a:prstGeom prst="rect">
+            <a:avLst/>
+          </a:prstGeom>
+          <a:solidFill>
+            <a:srgbClr val="9A6310"/>
+          </a:solidFill>
+          <a:ln/>
+        </p:spPr>
+      </p:sp>
+      <p:sp>
+        <p:nvSpPr>
+          <p:cNvPr id="15" name="Text 13"/>
+          <p:cNvSpPr/>
+          <p:nvPr/>
+        </p:nvSpPr>
+        <p:spPr>
+          <a:xfrm>
+            <a:off x="6291072" y="1929384"/>
+            <a:ext cx="2121408" cy="256032"/>
+          </a:xfrm>
+          <a:prstGeom prst="rect">
+            <a:avLst/>
+          </a:prstGeom>
+          <a:noFill/>
+          <a:ln/>
+        </p:spPr>
+        <p:txBody>
+          <a:bodyPr wrap="square" lIns="0" tIns="0" rIns="0" bIns="0" rtlCol="0" anchor="t"/>
+          <a:lstStyle/>
+          <a:p>
+            <a:pPr indent="0" marL="0">
+              <a:buNone/>
+            </a:pPr>
+            <a:r>
+              <a:rPr lang="en-US" sz="1300" b="1" dirty="0">
+                <a:solidFill>
+                  <a:srgbClr val="272E52"/>
+                </a:solidFill>
+                <a:latin typeface="Arial" pitchFamily="34" charset="0"/>
+                <a:ea typeface="Arial" pitchFamily="34" charset="-122"/>
+                <a:cs typeface="Arial" pitchFamily="34" charset="-120"/>
+              </a:rPr>
+              <a:t>Ein Muster</a:t>
+            </a:r>
+            <a:endParaRPr lang="en-US" sz="1300" dirty="0"/>
+          </a:p>
+        </p:txBody>
+      </p:sp>
+      <p:sp>
+        <p:nvSpPr>
+          <p:cNvPr id="16" name="Text 14"/>
+          <p:cNvSpPr/>
+          <p:nvPr/>
+        </p:nvSpPr>
+        <p:spPr>
+          <a:xfrm>
+            <a:off x="6291072" y="2231136"/>
+            <a:ext cx="2121408" cy="1399032"/>
+          </a:xfrm>
+          <a:prstGeom prst="rect">
+            <a:avLst/>
+          </a:prstGeom>
+          <a:noFill/>
+          <a:ln/>
+        </p:spPr>
+        <p:txBody>
+          <a:bodyPr wrap="square" lIns="0" tIns="0" rIns="0" bIns="0" rtlCol="0" anchor="t"/>
+          <a:lstStyle/>
+          <a:p>
+            <a:pPr indent="0" marL="0">
+              <a:lnSpc>
+                <a:spcPct val="92000"/>
+              </a:lnSpc>
+              <a:buNone/>
+            </a:pPr>
+            <a:r>
+              <a:rPr lang="en-US" sz="1100" dirty="0">
+                <a:solidFill>
+                  <a:srgbClr val="434A63"/>
+                </a:solidFill>
+                <a:latin typeface="Arial" pitchFamily="34" charset="0"/>
+                <a:ea typeface="Arial" pitchFamily="34" charset="-122"/>
+                <a:cs typeface="Arial" pitchFamily="34" charset="-120"/>
+              </a:rPr>
+              <a:t>Netze trennt man mit Absicht: VLAN, DMZ, Firewall-Regeln. Das Zonenmodell seht ihr im Sicherheitsblock wieder.</a:t>
+            </a:r>
+            <a:endParaRPr lang="en-US" sz="1100" dirty="0"/>
+          </a:p>
+        </p:txBody>
+      </p:sp>
+      <p:sp>
+        <p:nvSpPr>
+          <p:cNvPr id="17" name="Shape 15"/>
+          <p:cNvSpPr/>
+          <p:nvPr/>
+        </p:nvSpPr>
+        <p:spPr>
+          <a:xfrm>
+            <a:off x="566928" y="3877056"/>
+            <a:ext cx="8010144" cy="512064"/>
+          </a:xfrm>
+          <a:prstGeom prst="rect">
+            <a:avLst/>
+          </a:prstGeom>
+          <a:solidFill>
+            <a:srgbClr val="EEF0FB"/>
+          </a:solidFill>
+          <a:ln/>
+        </p:spPr>
+      </p:sp>
+      <p:sp>
+        <p:nvSpPr>
+          <p:cNvPr id="18" name="Shape 16"/>
+          <p:cNvSpPr/>
+          <p:nvPr/>
+        </p:nvSpPr>
+        <p:spPr>
+          <a:xfrm>
+            <a:off x="566928" y="3877056"/>
+            <a:ext cx="41148" cy="512064"/>
+          </a:xfrm>
+          <a:prstGeom prst="rect">
+            <a:avLst/>
+          </a:prstGeom>
+          <a:solidFill>
+            <a:srgbClr val="3843AF"/>
+          </a:solidFill>
+          <a:ln/>
+        </p:spPr>
+      </p:sp>
+      <p:sp>
+        <p:nvSpPr>
+          <p:cNvPr id="19" name="Text 17"/>
+          <p:cNvSpPr/>
+          <p:nvPr/>
+        </p:nvSpPr>
+        <p:spPr>
+          <a:xfrm>
+            <a:off x="804672" y="4023360"/>
+            <a:ext cx="7607808" cy="246888"/>
+          </a:xfrm>
+          <a:prstGeom prst="rect">
+            <a:avLst/>
+          </a:prstGeom>
+          <a:noFill/>
+          <a:ln/>
+        </p:spPr>
+        <p:txBody>
+          <a:bodyPr wrap="square" lIns="0" tIns="0" rIns="0" bIns="0" rtlCol="0" anchor="t"/>
+          <a:lstStyle/>
+          <a:p>
+            <a:pPr indent="0" marL="0">
+              <a:lnSpc>
+                <a:spcPct val="92000"/>
+              </a:lnSpc>
+              <a:buNone/>
+            </a:pPr>
+            <a:r>
+              <a:rPr lang="en-US" sz="1150" dirty="0">
+                <a:solidFill>
+                  <a:srgbClr val="434A63"/>
+                </a:solidFill>
+                <a:latin typeface="Arial" pitchFamily="34" charset="0"/>
+                <a:ea typeface="Arial" pitchFamily="34" charset="-122"/>
+                <a:cs typeface="Arial" pitchFamily="34" charset="-120"/>
+              </a:rPr>
+              <a:t>Alles bleibt online zum Nachschlagen – inklusive der Seiten, die wir nicht gemeinsam behandelt haben.</a:t>
+            </a:r>
+            <a:endParaRPr lang="en-US" sz="1150" dirty="0"/>
+          </a:p>
+        </p:txBody>
+      </p:sp>
+      <p:sp>
+        <p:nvSpPr>
+          <p:cNvPr id="20" name="Shape 18"/>
           <p:cNvSpPr/>
           <p:nvPr/>
         </p:nvSpPr>
@@ -14792,7 +15124,7 @@
       </p:sp>
       <p:sp>
         <p:nvSpPr>
-          <p:cNvPr id="9" name="Text 6"/>
+          <p:cNvPr id="21" name="Text 19"/>
           <p:cNvSpPr/>
           <p:nvPr/>
         </p:nvSpPr>
@@ -14823,7 +15155,7 @@
                 <a:ea typeface="Arial" pitchFamily="34" charset="-122"/>
                 <a:cs typeface="Arial" pitchFamily="34" charset="-120"/>
               </a:rPr>
-              <a:t>Das Finale</a:t>
+              <a:t>Abschluss</a:t>
             </a:r>
             <a:endParaRPr lang="en-US" sz="1050" dirty="0"/>
           </a:p>
@@ -14831,7 +15163,7 @@
       </p:sp>
       <p:sp>
         <p:nvSpPr>
-          <p:cNvPr id="10" name="Text 7"/>
+          <p:cNvPr id="22" name="Text 20"/>
           <p:cNvSpPr/>
           <p:nvPr/>
         </p:nvSpPr>
@@ -14862,7 +15194,7 @@
                 <a:ea typeface="Arial" pitchFamily="34" charset="-122"/>
                 <a:cs typeface="Arial" pitchFamily="34" charset="-120"/>
               </a:rPr>
-              <a:t>29/31</a:t>
+              <a:t>29/30</a:t>
             </a:r>
             <a:endParaRPr lang="en-US" sz="1050" dirty="0"/>
           </a:p>
@@ -14953,7 +15285,7 @@
                 <a:ea typeface="Arial" pitchFamily="34" charset="-122"/>
                 <a:cs typeface="Arial" pitchFamily="34" charset="-120"/>
               </a:rPr>
-              <a:t>DREI ABENDE, EIN WERKZEUGKASTEN</a:t>
+              <a:t>AUSBLICK</a:t>
             </a:r>
             <a:endParaRPr lang="en-US" sz="1150" dirty="0"/>
           </a:p>
@@ -14992,7 +15324,7 @@
                 <a:ea typeface="Arial" pitchFamily="34" charset="-122"/>
                 <a:cs typeface="Arial" pitchFamily="34" charset="-120"/>
               </a:rPr>
-              <a:t>Was der Netzwerkblock euch gegeben hat</a:t>
+              <a:t>Bis Montag</a:t>
             </a:r>
             <a:endParaRPr lang="en-US" sz="2600" dirty="0"/>
           </a:p>
@@ -15000,14 +15332,53 @@
       </p:sp>
       <p:sp>
         <p:nvSpPr>
-          <p:cNvPr id="5" name="Shape 3"/>
-          <p:cNvSpPr/>
-          <p:nvPr/>
-        </p:nvSpPr>
-        <p:spPr>
-          <a:xfrm>
-            <a:off x="566928" y="1783080"/>
-            <a:ext cx="2523744" cy="1965960"/>
+          <p:cNvPr id="5" name="Text 3"/>
+          <p:cNvSpPr/>
+          <p:nvPr/>
+        </p:nvSpPr>
+        <p:spPr>
+          <a:xfrm>
+            <a:off x="566928" y="1444752"/>
+            <a:ext cx="8010144" cy="438912"/>
+          </a:xfrm>
+          <a:prstGeom prst="rect">
+            <a:avLst/>
+          </a:prstGeom>
+          <a:noFill/>
+          <a:ln/>
+        </p:spPr>
+        <p:txBody>
+          <a:bodyPr wrap="square" lIns="0" tIns="0" rIns="0" bIns="0" rtlCol="0" anchor="t"/>
+          <a:lstStyle/>
+          <a:p>
+            <a:pPr indent="0" marL="0">
+              <a:buNone/>
+            </a:pPr>
+            <a:r>
+              <a:rPr lang="en-US" sz="1300" dirty="0">
+                <a:solidFill>
+                  <a:srgbClr val="5C6377"/>
+                </a:solidFill>
+                <a:latin typeface="Arial" pitchFamily="34" charset="0"/>
+                <a:ea typeface="Arial" pitchFamily="34" charset="-122"/>
+                <a:cs typeface="Arial" pitchFamily="34" charset="-120"/>
+              </a:rPr>
+              <a:t>Ab Montag bauen wir – der Netzwerkblock ist geschafft.</a:t>
+            </a:r>
+            <a:endParaRPr lang="en-US" sz="1300" dirty="0"/>
+          </a:p>
+        </p:txBody>
+      </p:sp>
+      <p:sp>
+        <p:nvSpPr>
+          <p:cNvPr id="6" name="Shape 4"/>
+          <p:cNvSpPr/>
+          <p:nvPr/>
+        </p:nvSpPr>
+        <p:spPr>
+          <a:xfrm>
+            <a:off x="566928" y="1975104"/>
+            <a:ext cx="2523744" cy="1920240"/>
           </a:xfrm>
           <a:prstGeom prst="rect">
             <a:avLst/>
@@ -15020,14 +15391,14 @@
       </p:sp>
       <p:sp>
         <p:nvSpPr>
-          <p:cNvPr id="6" name="Shape 4"/>
-          <p:cNvSpPr/>
-          <p:nvPr/>
-        </p:nvSpPr>
-        <p:spPr>
-          <a:xfrm>
-            <a:off x="566928" y="1783080"/>
-            <a:ext cx="41148" cy="1965960"/>
+          <p:cNvPr id="7" name="Shape 5"/>
+          <p:cNvSpPr/>
+          <p:nvPr/>
+        </p:nvSpPr>
+        <p:spPr>
+          <a:xfrm>
+            <a:off x="566928" y="1975104"/>
+            <a:ext cx="41148" cy="1920240"/>
           </a:xfrm>
           <a:prstGeom prst="rect">
             <a:avLst/>
@@ -15040,13 +15411,13 @@
       </p:sp>
       <p:sp>
         <p:nvSpPr>
-          <p:cNvPr id="7" name="Text 5"/>
-          <p:cNvSpPr/>
-          <p:nvPr/>
-        </p:nvSpPr>
-        <p:spPr>
-          <a:xfrm>
-            <a:off x="804672" y="1929384"/>
+          <p:cNvPr id="8" name="Text 6"/>
+          <p:cNvSpPr/>
+          <p:nvPr/>
+        </p:nvSpPr>
+        <p:spPr>
+          <a:xfrm>
+            <a:off x="804672" y="2121408"/>
             <a:ext cx="2121408" cy="256032"/>
           </a:xfrm>
           <a:prstGeom prst="rect">
@@ -15071,7 +15442,7 @@
                 <a:ea typeface="Arial" pitchFamily="34" charset="-122"/>
                 <a:cs typeface="Arial" pitchFamily="34" charset="-120"/>
               </a:rPr>
-              <a:t>Ein Raster</a:t>
+              <a:t>Virtualisierung</a:t>
             </a:r>
             <a:endParaRPr lang="en-US" sz="1300" dirty="0"/>
           </a:p>
@@ -15079,14 +15450,14 @@
       </p:sp>
       <p:sp>
         <p:nvSpPr>
-          <p:cNvPr id="8" name="Text 6"/>
-          <p:cNvSpPr/>
-          <p:nvPr/>
-        </p:nvSpPr>
-        <p:spPr>
-          <a:xfrm>
-            <a:off x="804672" y="2231136"/>
-            <a:ext cx="2121408" cy="1399032"/>
+          <p:cNvPr id="9" name="Text 7"/>
+          <p:cNvSpPr/>
+          <p:nvPr/>
+        </p:nvSpPr>
+        <p:spPr>
+          <a:xfrm>
+            <a:off x="804672" y="2423160"/>
+            <a:ext cx="2121408" cy="1353312"/>
           </a:xfrm>
           <a:prstGeom prst="rect">
             <a:avLst/>
@@ -15105,7 +15476,7 @@
               <a:buNone/>
             </a:pPr>
             <a:r>
-              <a:rPr lang="en-US" sz="1100" dirty="0">
+              <a:rPr lang="en-US" sz="1150" dirty="0">
                 <a:solidFill>
                   <a:srgbClr val="434A63"/>
                 </a:solidFill>
@@ -15113,22 +15484,22 @@
                 <a:ea typeface="Arial" pitchFamily="34" charset="-122"/>
                 <a:cs typeface="Arial" pitchFamily="34" charset="-120"/>
               </a:rPr>
-              <a:t>Die Schichten als Suchraster: von unten nach oben, jeder Befehl beweist seine Schicht. Heute habt ihr fünf echte Fälle so gelöst.</a:t>
-            </a:r>
-            <a:endParaRPr lang="en-US" sz="1100" dirty="0"/>
-          </a:p>
-        </p:txBody>
-      </p:sp>
-      <p:sp>
-        <p:nvSpPr>
-          <p:cNvPr id="9" name="Shape 7"/>
-          <p:cNvSpPr/>
-          <p:nvPr/>
-        </p:nvSpPr>
-        <p:spPr>
-          <a:xfrm>
-            <a:off x="3310128" y="1783080"/>
-            <a:ext cx="2523744" cy="1965960"/>
+              <a:t>Hypervisor, virtuelle Maschinen, virtuelle Netze – und ihr startet eure erste eigene VM. Das Werkzeug dafür richten wir gemeinsam ein.</a:t>
+            </a:r>
+            <a:endParaRPr lang="en-US" sz="1150" dirty="0"/>
+          </a:p>
+        </p:txBody>
+      </p:sp>
+      <p:sp>
+        <p:nvSpPr>
+          <p:cNvPr id="10" name="Shape 8"/>
+          <p:cNvSpPr/>
+          <p:nvPr/>
+        </p:nvSpPr>
+        <p:spPr>
+          <a:xfrm>
+            <a:off x="3310128" y="1975104"/>
+            <a:ext cx="2523744" cy="1920240"/>
           </a:xfrm>
           <a:prstGeom prst="rect">
             <a:avLst/>
@@ -15141,33 +15512,33 @@
       </p:sp>
       <p:sp>
         <p:nvSpPr>
-          <p:cNvPr id="10" name="Shape 8"/>
-          <p:cNvSpPr/>
-          <p:nvPr/>
-        </p:nvSpPr>
-        <p:spPr>
-          <a:xfrm>
-            <a:off x="3310128" y="1783080"/>
-            <a:ext cx="41148" cy="1965960"/>
+          <p:cNvPr id="11" name="Shape 9"/>
+          <p:cNvSpPr/>
+          <p:nvPr/>
+        </p:nvSpPr>
+        <p:spPr>
+          <a:xfrm>
+            <a:off x="3310128" y="1975104"/>
+            <a:ext cx="41148" cy="1920240"/>
           </a:xfrm>
           <a:prstGeom prst="rect">
             <a:avLst/>
           </a:prstGeom>
           <a:solidFill>
-            <a:srgbClr val="0F7C86"/>
+            <a:srgbClr val="3843AF"/>
           </a:solidFill>
           <a:ln/>
         </p:spPr>
       </p:sp>
       <p:sp>
         <p:nvSpPr>
-          <p:cNvPr id="11" name="Text 9"/>
-          <p:cNvSpPr/>
-          <p:nvPr/>
-        </p:nvSpPr>
-        <p:spPr>
-          <a:xfrm>
-            <a:off x="3547872" y="1929384"/>
+          <p:cNvPr id="12" name="Text 10"/>
+          <p:cNvSpPr/>
+          <p:nvPr/>
+        </p:nvSpPr>
+        <p:spPr>
+          <a:xfrm>
+            <a:off x="3547872" y="2121408"/>
             <a:ext cx="2121408" cy="256032"/>
           </a:xfrm>
           <a:prstGeom prst="rect">
@@ -15192,7 +15563,7 @@
                 <a:ea typeface="Arial" pitchFamily="34" charset="-122"/>
                 <a:cs typeface="Arial" pitchFamily="34" charset="-120"/>
               </a:rPr>
-              <a:t>Ein Handwerk</a:t>
+              <a:t>Nichts vorbereiten</a:t>
             </a:r>
             <a:endParaRPr lang="en-US" sz="1300" dirty="0"/>
           </a:p>
@@ -15200,14 +15571,14 @@
       </p:sp>
       <p:sp>
         <p:nvSpPr>
-          <p:cNvPr id="12" name="Text 10"/>
-          <p:cNvSpPr/>
-          <p:nvPr/>
-        </p:nvSpPr>
-        <p:spPr>
-          <a:xfrm>
-            <a:off x="3547872" y="2231136"/>
-            <a:ext cx="2121408" cy="1399032"/>
+          <p:cNvPr id="13" name="Text 11"/>
+          <p:cNvSpPr/>
+          <p:nvPr/>
+        </p:nvSpPr>
+        <p:spPr>
+          <a:xfrm>
+            <a:off x="3547872" y="2423160"/>
+            <a:ext cx="2121408" cy="1353312"/>
           </a:xfrm>
           <a:prstGeom prst="rect">
             <a:avLst/>
@@ -15226,7 +15597,7 @@
               <a:buNone/>
             </a:pPr>
             <a:r>
-              <a:rPr lang="en-US" sz="1100" dirty="0">
+              <a:rPr lang="en-US" sz="1150" dirty="0">
                 <a:solidFill>
                   <a:srgbClr val="434A63"/>
                 </a:solidFill>
@@ -15234,22 +15605,22 @@
                 <a:ea typeface="Arial" pitchFamily="34" charset="-122"/>
                 <a:cs typeface="Arial" pitchFamily="34" charset="-120"/>
               </a:rPr>
-              <a:t>Subnetze rechnen und Netze planen – Maske, Blockgröße, minus zwei. Das tragt ihr in jede Infrastruktur, die noch kommt.</a:t>
-            </a:r>
-            <a:endParaRPr lang="en-US" sz="1100" dirty="0"/>
-          </a:p>
-        </p:txBody>
-      </p:sp>
-      <p:sp>
-        <p:nvSpPr>
-          <p:cNvPr id="13" name="Shape 11"/>
-          <p:cNvSpPr/>
-          <p:nvPr/>
-        </p:nvSpPr>
-        <p:spPr>
-          <a:xfrm>
-            <a:off x="6053328" y="1783080"/>
-            <a:ext cx="2523744" cy="1965960"/>
+              <a:t>Ihr braucht nur euren Rechner. Wer mag, liest vorab die Seite „Virtualisierung“ auf der Kursseite an – Pflicht ist das nicht.</a:t>
+            </a:r>
+            <a:endParaRPr lang="en-US" sz="1150" dirty="0"/>
+          </a:p>
+        </p:txBody>
+      </p:sp>
+      <p:sp>
+        <p:nvSpPr>
+          <p:cNvPr id="14" name="Shape 12"/>
+          <p:cNvSpPr/>
+          <p:nvPr/>
+        </p:nvSpPr>
+        <p:spPr>
+          <a:xfrm>
+            <a:off x="6053328" y="1975104"/>
+            <a:ext cx="2523744" cy="1920240"/>
           </a:xfrm>
           <a:prstGeom prst="rect">
             <a:avLst/>
@@ -15262,33 +15633,33 @@
       </p:sp>
       <p:sp>
         <p:nvSpPr>
-          <p:cNvPr id="14" name="Shape 12"/>
-          <p:cNvSpPr/>
-          <p:nvPr/>
-        </p:nvSpPr>
-        <p:spPr>
-          <a:xfrm>
-            <a:off x="6053328" y="1783080"/>
-            <a:ext cx="41148" cy="1965960"/>
+          <p:cNvPr id="15" name="Shape 13"/>
+          <p:cNvSpPr/>
+          <p:nvPr/>
+        </p:nvSpPr>
+        <p:spPr>
+          <a:xfrm>
+            <a:off x="6053328" y="1975104"/>
+            <a:ext cx="41148" cy="1920240"/>
           </a:xfrm>
           <a:prstGeom prst="rect">
             <a:avLst/>
           </a:prstGeom>
           <a:solidFill>
-            <a:srgbClr val="9A6310"/>
+            <a:srgbClr val="3843AF"/>
           </a:solidFill>
           <a:ln/>
         </p:spPr>
       </p:sp>
       <p:sp>
         <p:nvSpPr>
-          <p:cNvPr id="15" name="Text 13"/>
-          <p:cNvSpPr/>
-          <p:nvPr/>
-        </p:nvSpPr>
-        <p:spPr>
-          <a:xfrm>
-            <a:off x="6291072" y="1929384"/>
+          <p:cNvPr id="16" name="Text 14"/>
+          <p:cNvSpPr/>
+          <p:nvPr/>
+        </p:nvSpPr>
+        <p:spPr>
+          <a:xfrm>
+            <a:off x="6291072" y="2121408"/>
             <a:ext cx="2121408" cy="256032"/>
           </a:xfrm>
           <a:prstGeom prst="rect">
@@ -15313,7 +15684,7 @@
                 <a:ea typeface="Arial" pitchFamily="34" charset="-122"/>
                 <a:cs typeface="Arial" pitchFamily="34" charset="-120"/>
               </a:rPr>
-              <a:t>Ein Muster</a:t>
+              <a:t>Offene Rechnungen</a:t>
             </a:r>
             <a:endParaRPr lang="en-US" sz="1300" dirty="0"/>
           </a:p>
@@ -15321,14 +15692,14 @@
       </p:sp>
       <p:sp>
         <p:nvSpPr>
-          <p:cNvPr id="16" name="Text 14"/>
-          <p:cNvSpPr/>
-          <p:nvPr/>
-        </p:nvSpPr>
-        <p:spPr>
-          <a:xfrm>
-            <a:off x="6291072" y="2231136"/>
-            <a:ext cx="2121408" cy="1399032"/>
+          <p:cNvPr id="17" name="Text 15"/>
+          <p:cNvSpPr/>
+          <p:nvPr/>
+        </p:nvSpPr>
+        <p:spPr>
+          <a:xfrm>
+            <a:off x="6291072" y="2423160"/>
+            <a:ext cx="2121408" cy="1353312"/>
           </a:xfrm>
           <a:prstGeom prst="rect">
             <a:avLst/>
@@ -15347,7 +15718,7 @@
               <a:buNone/>
             </a:pPr>
             <a:r>
-              <a:rPr lang="en-US" sz="1100" dirty="0">
+              <a:rPr lang="en-US" sz="1150" dirty="0">
                 <a:solidFill>
                   <a:srgbClr val="434A63"/>
                 </a:solidFill>
@@ -15355,31 +15726,11 @@
                 <a:ea typeface="Arial" pitchFamily="34" charset="-122"/>
                 <a:cs typeface="Arial" pitchFamily="34" charset="-120"/>
               </a:rPr>
-              <a:t>Netze trennt man mit Absicht: VLAN, DMZ, Firewall-Regeln. Das Zonenmodell seht ihr im Sicherheitsblock wieder.</a:t>
-            </a:r>
-            <a:endParaRPr lang="en-US" sz="1100" dirty="0"/>
-          </a:p>
-        </p:txBody>
-      </p:sp>
-      <p:sp>
-        <p:nvSpPr>
-          <p:cNvPr id="17" name="Shape 15"/>
-          <p:cNvSpPr/>
-          <p:nvPr/>
-        </p:nvSpPr>
-        <p:spPr>
-          <a:xfrm>
-            <a:off x="566928" y="3877056"/>
-            <a:ext cx="8010144" cy="512064"/>
-          </a:xfrm>
-          <a:prstGeom prst="rect">
-            <a:avLst/>
-          </a:prstGeom>
-          <a:solidFill>
-            <a:srgbClr val="EEF0FB"/>
-          </a:solidFill>
-          <a:ln/>
-        </p:spPr>
+              <a:t>Wer bei den Fällen 3 und 4 geschwommen ist: Die Montags-Seiten zu Adressierung und Routing schließen die Lücke.</a:t>
+            </a:r>
+            <a:endParaRPr lang="en-US" sz="1150" dirty="0"/>
+          </a:p>
+        </p:txBody>
       </p:sp>
       <p:sp>
         <p:nvSpPr>
@@ -15389,8 +15740,8 @@
         </p:nvSpPr>
         <p:spPr>
           <a:xfrm>
-            <a:off x="566928" y="3877056"/>
-            <a:ext cx="41148" cy="512064"/>
+            <a:off x="566928" y="4160520"/>
+            <a:ext cx="32004" cy="256032"/>
           </a:xfrm>
           <a:prstGeom prst="rect">
             <a:avLst/>
@@ -15409,27 +15760,24 @@
         </p:nvSpPr>
         <p:spPr>
           <a:xfrm>
-            <a:off x="804672" y="4023360"/>
-            <a:ext cx="7607808" cy="246888"/>
-          </a:xfrm>
-          <a:prstGeom prst="rect">
-            <a:avLst/>
-          </a:prstGeom>
-          <a:noFill/>
-          <a:ln/>
-        </p:spPr>
-        <p:txBody>
-          <a:bodyPr wrap="square" lIns="0" tIns="0" rIns="0" bIns="0" rtlCol="0" anchor="t"/>
-          <a:lstStyle/>
-          <a:p>
-            <a:pPr indent="0" marL="0">
-              <a:lnSpc>
-                <a:spcPct val="92000"/>
-              </a:lnSpc>
-              <a:buNone/>
-            </a:pPr>
-            <a:r>
-              <a:rPr lang="en-US" sz="1150" dirty="0">
+            <a:off x="749808" y="4114800"/>
+            <a:ext cx="7827264" cy="402336"/>
+          </a:xfrm>
+          <a:prstGeom prst="rect">
+            <a:avLst/>
+          </a:prstGeom>
+          <a:noFill/>
+          <a:ln/>
+        </p:spPr>
+        <p:txBody>
+          <a:bodyPr wrap="square" lIns="0" tIns="0" rIns="0" bIns="0" rtlCol="0" anchor="ctr"/>
+          <a:lstStyle/>
+          <a:p>
+            <a:pPr indent="0" marL="0">
+              <a:buNone/>
+            </a:pPr>
+            <a:r>
+              <a:rPr lang="en-US" sz="1200" b="1" dirty="0">
                 <a:solidFill>
                   <a:srgbClr val="434A63"/>
                 </a:solidFill>
@@ -15437,9 +15785,9 @@
                 <a:ea typeface="Arial" pitchFamily="34" charset="-122"/>
                 <a:cs typeface="Arial" pitchFamily="34" charset="-120"/>
               </a:rPr>
-              <a:t>Alles bleibt online zum Nachschlagen – inklusive der Seiten, die wir nicht gemeinsam behandelt haben.</a:t>
-            </a:r>
-            <a:endParaRPr lang="en-US" sz="1150" dirty="0"/>
+              <a:t>Nächster Termin: Montag, 7. September, 18:00 Uhr – Virtualisierung.</a:t>
+            </a:r>
+            <a:endParaRPr lang="en-US" sz="1200" dirty="0"/>
           </a:p>
         </p:txBody>
       </p:sp>
@@ -15538,7 +15886,7 @@
                 <a:ea typeface="Arial" pitchFamily="34" charset="-122"/>
                 <a:cs typeface="Arial" pitchFamily="34" charset="-120"/>
               </a:rPr>
-              <a:t>30/31</a:t>
+              <a:t>30/30</a:t>
             </a:r>
             <a:endParaRPr lang="en-US" sz="1050" dirty="0"/>
           </a:p>
@@ -15555,698 +15903,6 @@
 <file path=ppt/slides/slide36.xml><?xml version="1.0" encoding="utf-8"?>
 <p:sld xmlns:a="http://schemas.openxmlformats.org/drawingml/2006/main" xmlns:r="http://schemas.openxmlformats.org/officeDocument/2006/relationships" xmlns:p="http://schemas.openxmlformats.org/presentationml/2006/main">
   <p:cSld name="Slide 36">
-    <p:bg>
-      <p:bgPr>
-        <a:solidFill>
-          <a:srgbClr val="FFFFFF"/>
-        </a:solidFill>
-      </p:bgPr>
-    </p:bg>
-    <p:spTree>
-      <p:nvGrpSpPr>
-        <p:cNvPr id="1" name=""/>
-        <p:cNvGrpSpPr/>
-        <p:nvPr/>
-      </p:nvGrpSpPr>
-      <p:grpSpPr>
-        <a:xfrm>
-          <a:off x="0" y="0"/>
-          <a:ext cx="0" cy="0"/>
-          <a:chOff x="0" y="0"/>
-          <a:chExt cx="0" cy="0"/>
-        </a:xfrm>
-      </p:grpSpPr>
-      <p:sp>
-        <p:nvSpPr>
-          <p:cNvPr id="2" name="Shape 0"/>
-          <p:cNvSpPr/>
-          <p:nvPr/>
-        </p:nvSpPr>
-        <p:spPr>
-          <a:xfrm>
-            <a:off x="566928" y="201168"/>
-            <a:ext cx="475488" cy="50292"/>
-          </a:xfrm>
-          <a:prstGeom prst="rect">
-            <a:avLst/>
-          </a:prstGeom>
-          <a:solidFill>
-            <a:srgbClr val="3843AF"/>
-          </a:solidFill>
-          <a:ln/>
-        </p:spPr>
-      </p:sp>
-      <p:sp>
-        <p:nvSpPr>
-          <p:cNvPr id="3" name="Text 1"/>
-          <p:cNvSpPr/>
-          <p:nvPr/>
-        </p:nvSpPr>
-        <p:spPr>
-          <a:xfrm>
-            <a:off x="566928" y="384048"/>
-            <a:ext cx="8010144" cy="237744"/>
-          </a:xfrm>
-          <a:prstGeom prst="rect">
-            <a:avLst/>
-          </a:prstGeom>
-          <a:noFill/>
-          <a:ln/>
-        </p:spPr>
-        <p:txBody>
-          <a:bodyPr wrap="square" lIns="0" tIns="0" rIns="0" bIns="0" rtlCol="0" anchor="ctr"/>
-          <a:lstStyle/>
-          <a:p>
-            <a:pPr indent="0" marL="0">
-              <a:buNone/>
-            </a:pPr>
-            <a:r>
-              <a:rPr lang="en-US" sz="1150" b="1" spc="180" kern="0" dirty="0">
-                <a:solidFill>
-                  <a:srgbClr val="3843AF"/>
-                </a:solidFill>
-                <a:latin typeface="Arial" pitchFamily="34" charset="0"/>
-                <a:ea typeface="Arial" pitchFamily="34" charset="-122"/>
-                <a:cs typeface="Arial" pitchFamily="34" charset="-120"/>
-              </a:rPr>
-              <a:t>AUSBLICK</a:t>
-            </a:r>
-            <a:endParaRPr lang="en-US" sz="1150" dirty="0"/>
-          </a:p>
-        </p:txBody>
-      </p:sp>
-      <p:sp>
-        <p:nvSpPr>
-          <p:cNvPr id="4" name="Text 2"/>
-          <p:cNvSpPr/>
-          <p:nvPr/>
-        </p:nvSpPr>
-        <p:spPr>
-          <a:xfrm>
-            <a:off x="566928" y="731520"/>
-            <a:ext cx="8010144" cy="603504"/>
-          </a:xfrm>
-          <a:prstGeom prst="rect">
-            <a:avLst/>
-          </a:prstGeom>
-          <a:noFill/>
-          <a:ln/>
-        </p:spPr>
-        <p:txBody>
-          <a:bodyPr wrap="square" lIns="0" tIns="0" rIns="0" bIns="0" rtlCol="0" anchor="t"/>
-          <a:lstStyle/>
-          <a:p>
-            <a:pPr indent="0" marL="0">
-              <a:buNone/>
-            </a:pPr>
-            <a:r>
-              <a:rPr lang="en-US" sz="2600" b="1" dirty="0">
-                <a:solidFill>
-                  <a:srgbClr val="272E52"/>
-                </a:solidFill>
-                <a:latin typeface="Arial" pitchFamily="34" charset="0"/>
-                <a:ea typeface="Arial" pitchFamily="34" charset="-122"/>
-                <a:cs typeface="Arial" pitchFamily="34" charset="-120"/>
-              </a:rPr>
-              <a:t>Bis Montag</a:t>
-            </a:r>
-            <a:endParaRPr lang="en-US" sz="2600" dirty="0"/>
-          </a:p>
-        </p:txBody>
-      </p:sp>
-      <p:sp>
-        <p:nvSpPr>
-          <p:cNvPr id="5" name="Text 3"/>
-          <p:cNvSpPr/>
-          <p:nvPr/>
-        </p:nvSpPr>
-        <p:spPr>
-          <a:xfrm>
-            <a:off x="566928" y="1444752"/>
-            <a:ext cx="8010144" cy="438912"/>
-          </a:xfrm>
-          <a:prstGeom prst="rect">
-            <a:avLst/>
-          </a:prstGeom>
-          <a:noFill/>
-          <a:ln/>
-        </p:spPr>
-        <p:txBody>
-          <a:bodyPr wrap="square" lIns="0" tIns="0" rIns="0" bIns="0" rtlCol="0" anchor="t"/>
-          <a:lstStyle/>
-          <a:p>
-            <a:pPr indent="0" marL="0">
-              <a:buNone/>
-            </a:pPr>
-            <a:r>
-              <a:rPr lang="en-US" sz="1300" dirty="0">
-                <a:solidFill>
-                  <a:srgbClr val="5C6377"/>
-                </a:solidFill>
-                <a:latin typeface="Arial" pitchFamily="34" charset="0"/>
-                <a:ea typeface="Arial" pitchFamily="34" charset="-122"/>
-                <a:cs typeface="Arial" pitchFamily="34" charset="-120"/>
-              </a:rPr>
-              <a:t>Ab Montag bauen wir – der Netzwerkblock ist geschafft.</a:t>
-            </a:r>
-            <a:endParaRPr lang="en-US" sz="1300" dirty="0"/>
-          </a:p>
-        </p:txBody>
-      </p:sp>
-      <p:sp>
-        <p:nvSpPr>
-          <p:cNvPr id="6" name="Shape 4"/>
-          <p:cNvSpPr/>
-          <p:nvPr/>
-        </p:nvSpPr>
-        <p:spPr>
-          <a:xfrm>
-            <a:off x="566928" y="1975104"/>
-            <a:ext cx="2523744" cy="1920240"/>
-          </a:xfrm>
-          <a:prstGeom prst="rect">
-            <a:avLst/>
-          </a:prstGeom>
-          <a:solidFill>
-            <a:srgbClr val="F5F6FC"/>
-          </a:solidFill>
-          <a:ln/>
-        </p:spPr>
-      </p:sp>
-      <p:sp>
-        <p:nvSpPr>
-          <p:cNvPr id="7" name="Shape 5"/>
-          <p:cNvSpPr/>
-          <p:nvPr/>
-        </p:nvSpPr>
-        <p:spPr>
-          <a:xfrm>
-            <a:off x="566928" y="1975104"/>
-            <a:ext cx="41148" cy="1920240"/>
-          </a:xfrm>
-          <a:prstGeom prst="rect">
-            <a:avLst/>
-          </a:prstGeom>
-          <a:solidFill>
-            <a:srgbClr val="3843AF"/>
-          </a:solidFill>
-          <a:ln/>
-        </p:spPr>
-      </p:sp>
-      <p:sp>
-        <p:nvSpPr>
-          <p:cNvPr id="8" name="Text 6"/>
-          <p:cNvSpPr/>
-          <p:nvPr/>
-        </p:nvSpPr>
-        <p:spPr>
-          <a:xfrm>
-            <a:off x="804672" y="2121408"/>
-            <a:ext cx="2121408" cy="256032"/>
-          </a:xfrm>
-          <a:prstGeom prst="rect">
-            <a:avLst/>
-          </a:prstGeom>
-          <a:noFill/>
-          <a:ln/>
-        </p:spPr>
-        <p:txBody>
-          <a:bodyPr wrap="square" lIns="0" tIns="0" rIns="0" bIns="0" rtlCol="0" anchor="t"/>
-          <a:lstStyle/>
-          <a:p>
-            <a:pPr indent="0" marL="0">
-              <a:buNone/>
-            </a:pPr>
-            <a:r>
-              <a:rPr lang="en-US" sz="1300" b="1" dirty="0">
-                <a:solidFill>
-                  <a:srgbClr val="272E52"/>
-                </a:solidFill>
-                <a:latin typeface="Arial" pitchFamily="34" charset="0"/>
-                <a:ea typeface="Arial" pitchFamily="34" charset="-122"/>
-                <a:cs typeface="Arial" pitchFamily="34" charset="-120"/>
-              </a:rPr>
-              <a:t>Virtualisierung</a:t>
-            </a:r>
-            <a:endParaRPr lang="en-US" sz="1300" dirty="0"/>
-          </a:p>
-        </p:txBody>
-      </p:sp>
-      <p:sp>
-        <p:nvSpPr>
-          <p:cNvPr id="9" name="Text 7"/>
-          <p:cNvSpPr/>
-          <p:nvPr/>
-        </p:nvSpPr>
-        <p:spPr>
-          <a:xfrm>
-            <a:off x="804672" y="2423160"/>
-            <a:ext cx="2121408" cy="1353312"/>
-          </a:xfrm>
-          <a:prstGeom prst="rect">
-            <a:avLst/>
-          </a:prstGeom>
-          <a:noFill/>
-          <a:ln/>
-        </p:spPr>
-        <p:txBody>
-          <a:bodyPr wrap="square" lIns="0" tIns="0" rIns="0" bIns="0" rtlCol="0" anchor="t"/>
-          <a:lstStyle/>
-          <a:p>
-            <a:pPr indent="0" marL="0">
-              <a:lnSpc>
-                <a:spcPct val="92000"/>
-              </a:lnSpc>
-              <a:buNone/>
-            </a:pPr>
-            <a:r>
-              <a:rPr lang="en-US" sz="1150" dirty="0">
-                <a:solidFill>
-                  <a:srgbClr val="434A63"/>
-                </a:solidFill>
-                <a:latin typeface="Arial" pitchFamily="34" charset="0"/>
-                <a:ea typeface="Arial" pitchFamily="34" charset="-122"/>
-                <a:cs typeface="Arial" pitchFamily="34" charset="-120"/>
-              </a:rPr>
-              <a:t>Hypervisor, virtuelle Maschinen, virtuelle Netze – und ihr startet eure erste eigene VM. Das Werkzeug dafür richten wir gemeinsam ein.</a:t>
-            </a:r>
-            <a:endParaRPr lang="en-US" sz="1150" dirty="0"/>
-          </a:p>
-        </p:txBody>
-      </p:sp>
-      <p:sp>
-        <p:nvSpPr>
-          <p:cNvPr id="10" name="Shape 8"/>
-          <p:cNvSpPr/>
-          <p:nvPr/>
-        </p:nvSpPr>
-        <p:spPr>
-          <a:xfrm>
-            <a:off x="3310128" y="1975104"/>
-            <a:ext cx="2523744" cy="1920240"/>
-          </a:xfrm>
-          <a:prstGeom prst="rect">
-            <a:avLst/>
-          </a:prstGeom>
-          <a:solidFill>
-            <a:srgbClr val="F5F6FC"/>
-          </a:solidFill>
-          <a:ln/>
-        </p:spPr>
-      </p:sp>
-      <p:sp>
-        <p:nvSpPr>
-          <p:cNvPr id="11" name="Shape 9"/>
-          <p:cNvSpPr/>
-          <p:nvPr/>
-        </p:nvSpPr>
-        <p:spPr>
-          <a:xfrm>
-            <a:off x="3310128" y="1975104"/>
-            <a:ext cx="41148" cy="1920240"/>
-          </a:xfrm>
-          <a:prstGeom prst="rect">
-            <a:avLst/>
-          </a:prstGeom>
-          <a:solidFill>
-            <a:srgbClr val="3843AF"/>
-          </a:solidFill>
-          <a:ln/>
-        </p:spPr>
-      </p:sp>
-      <p:sp>
-        <p:nvSpPr>
-          <p:cNvPr id="12" name="Text 10"/>
-          <p:cNvSpPr/>
-          <p:nvPr/>
-        </p:nvSpPr>
-        <p:spPr>
-          <a:xfrm>
-            <a:off x="3547872" y="2121408"/>
-            <a:ext cx="2121408" cy="256032"/>
-          </a:xfrm>
-          <a:prstGeom prst="rect">
-            <a:avLst/>
-          </a:prstGeom>
-          <a:noFill/>
-          <a:ln/>
-        </p:spPr>
-        <p:txBody>
-          <a:bodyPr wrap="square" lIns="0" tIns="0" rIns="0" bIns="0" rtlCol="0" anchor="t"/>
-          <a:lstStyle/>
-          <a:p>
-            <a:pPr indent="0" marL="0">
-              <a:buNone/>
-            </a:pPr>
-            <a:r>
-              <a:rPr lang="en-US" sz="1300" b="1" dirty="0">
-                <a:solidFill>
-                  <a:srgbClr val="272E52"/>
-                </a:solidFill>
-                <a:latin typeface="Arial" pitchFamily="34" charset="0"/>
-                <a:ea typeface="Arial" pitchFamily="34" charset="-122"/>
-                <a:cs typeface="Arial" pitchFamily="34" charset="-120"/>
-              </a:rPr>
-              <a:t>Nichts vorbereiten</a:t>
-            </a:r>
-            <a:endParaRPr lang="en-US" sz="1300" dirty="0"/>
-          </a:p>
-        </p:txBody>
-      </p:sp>
-      <p:sp>
-        <p:nvSpPr>
-          <p:cNvPr id="13" name="Text 11"/>
-          <p:cNvSpPr/>
-          <p:nvPr/>
-        </p:nvSpPr>
-        <p:spPr>
-          <a:xfrm>
-            <a:off x="3547872" y="2423160"/>
-            <a:ext cx="2121408" cy="1353312"/>
-          </a:xfrm>
-          <a:prstGeom prst="rect">
-            <a:avLst/>
-          </a:prstGeom>
-          <a:noFill/>
-          <a:ln/>
-        </p:spPr>
-        <p:txBody>
-          <a:bodyPr wrap="square" lIns="0" tIns="0" rIns="0" bIns="0" rtlCol="0" anchor="t"/>
-          <a:lstStyle/>
-          <a:p>
-            <a:pPr indent="0" marL="0">
-              <a:lnSpc>
-                <a:spcPct val="92000"/>
-              </a:lnSpc>
-              <a:buNone/>
-            </a:pPr>
-            <a:r>
-              <a:rPr lang="en-US" sz="1150" dirty="0">
-                <a:solidFill>
-                  <a:srgbClr val="434A63"/>
-                </a:solidFill>
-                <a:latin typeface="Arial" pitchFamily="34" charset="0"/>
-                <a:ea typeface="Arial" pitchFamily="34" charset="-122"/>
-                <a:cs typeface="Arial" pitchFamily="34" charset="-120"/>
-              </a:rPr>
-              <a:t>Ihr braucht nur euren Rechner. Wer mag, liest vorab die Seite „Virtualisierung“ auf der Kursseite an – Pflicht ist das nicht.</a:t>
-            </a:r>
-            <a:endParaRPr lang="en-US" sz="1150" dirty="0"/>
-          </a:p>
-        </p:txBody>
-      </p:sp>
-      <p:sp>
-        <p:nvSpPr>
-          <p:cNvPr id="14" name="Shape 12"/>
-          <p:cNvSpPr/>
-          <p:nvPr/>
-        </p:nvSpPr>
-        <p:spPr>
-          <a:xfrm>
-            <a:off x="6053328" y="1975104"/>
-            <a:ext cx="2523744" cy="1920240"/>
-          </a:xfrm>
-          <a:prstGeom prst="rect">
-            <a:avLst/>
-          </a:prstGeom>
-          <a:solidFill>
-            <a:srgbClr val="F5F6FC"/>
-          </a:solidFill>
-          <a:ln/>
-        </p:spPr>
-      </p:sp>
-      <p:sp>
-        <p:nvSpPr>
-          <p:cNvPr id="15" name="Shape 13"/>
-          <p:cNvSpPr/>
-          <p:nvPr/>
-        </p:nvSpPr>
-        <p:spPr>
-          <a:xfrm>
-            <a:off x="6053328" y="1975104"/>
-            <a:ext cx="41148" cy="1920240"/>
-          </a:xfrm>
-          <a:prstGeom prst="rect">
-            <a:avLst/>
-          </a:prstGeom>
-          <a:solidFill>
-            <a:srgbClr val="3843AF"/>
-          </a:solidFill>
-          <a:ln/>
-        </p:spPr>
-      </p:sp>
-      <p:sp>
-        <p:nvSpPr>
-          <p:cNvPr id="16" name="Text 14"/>
-          <p:cNvSpPr/>
-          <p:nvPr/>
-        </p:nvSpPr>
-        <p:spPr>
-          <a:xfrm>
-            <a:off x="6291072" y="2121408"/>
-            <a:ext cx="2121408" cy="256032"/>
-          </a:xfrm>
-          <a:prstGeom prst="rect">
-            <a:avLst/>
-          </a:prstGeom>
-          <a:noFill/>
-          <a:ln/>
-        </p:spPr>
-        <p:txBody>
-          <a:bodyPr wrap="square" lIns="0" tIns="0" rIns="0" bIns="0" rtlCol="0" anchor="t"/>
-          <a:lstStyle/>
-          <a:p>
-            <a:pPr indent="0" marL="0">
-              <a:buNone/>
-            </a:pPr>
-            <a:r>
-              <a:rPr lang="en-US" sz="1300" b="1" dirty="0">
-                <a:solidFill>
-                  <a:srgbClr val="272E52"/>
-                </a:solidFill>
-                <a:latin typeface="Arial" pitchFamily="34" charset="0"/>
-                <a:ea typeface="Arial" pitchFamily="34" charset="-122"/>
-                <a:cs typeface="Arial" pitchFamily="34" charset="-120"/>
-              </a:rPr>
-              <a:t>Offene Rechnungen</a:t>
-            </a:r>
-            <a:endParaRPr lang="en-US" sz="1300" dirty="0"/>
-          </a:p>
-        </p:txBody>
-      </p:sp>
-      <p:sp>
-        <p:nvSpPr>
-          <p:cNvPr id="17" name="Text 15"/>
-          <p:cNvSpPr/>
-          <p:nvPr/>
-        </p:nvSpPr>
-        <p:spPr>
-          <a:xfrm>
-            <a:off x="6291072" y="2423160"/>
-            <a:ext cx="2121408" cy="1353312"/>
-          </a:xfrm>
-          <a:prstGeom prst="rect">
-            <a:avLst/>
-          </a:prstGeom>
-          <a:noFill/>
-          <a:ln/>
-        </p:spPr>
-        <p:txBody>
-          <a:bodyPr wrap="square" lIns="0" tIns="0" rIns="0" bIns="0" rtlCol="0" anchor="t"/>
-          <a:lstStyle/>
-          <a:p>
-            <a:pPr indent="0" marL="0">
-              <a:lnSpc>
-                <a:spcPct val="92000"/>
-              </a:lnSpc>
-              <a:buNone/>
-            </a:pPr>
-            <a:r>
-              <a:rPr lang="en-US" sz="1150" dirty="0">
-                <a:solidFill>
-                  <a:srgbClr val="434A63"/>
-                </a:solidFill>
-                <a:latin typeface="Arial" pitchFamily="34" charset="0"/>
-                <a:ea typeface="Arial" pitchFamily="34" charset="-122"/>
-                <a:cs typeface="Arial" pitchFamily="34" charset="-120"/>
-              </a:rPr>
-              <a:t>Wer bei den Fällen 3 und 4 geschwommen ist: Die Montags-Seiten zu Adressierung und Routing schließen die Lücke.</a:t>
-            </a:r>
-            <a:endParaRPr lang="en-US" sz="1150" dirty="0"/>
-          </a:p>
-        </p:txBody>
-      </p:sp>
-      <p:sp>
-        <p:nvSpPr>
-          <p:cNvPr id="18" name="Shape 16"/>
-          <p:cNvSpPr/>
-          <p:nvPr/>
-        </p:nvSpPr>
-        <p:spPr>
-          <a:xfrm>
-            <a:off x="566928" y="4160520"/>
-            <a:ext cx="32004" cy="256032"/>
-          </a:xfrm>
-          <a:prstGeom prst="rect">
-            <a:avLst/>
-          </a:prstGeom>
-          <a:solidFill>
-            <a:srgbClr val="3843AF"/>
-          </a:solidFill>
-          <a:ln/>
-        </p:spPr>
-      </p:sp>
-      <p:sp>
-        <p:nvSpPr>
-          <p:cNvPr id="19" name="Text 17"/>
-          <p:cNvSpPr/>
-          <p:nvPr/>
-        </p:nvSpPr>
-        <p:spPr>
-          <a:xfrm>
-            <a:off x="749808" y="4114800"/>
-            <a:ext cx="7827264" cy="402336"/>
-          </a:xfrm>
-          <a:prstGeom prst="rect">
-            <a:avLst/>
-          </a:prstGeom>
-          <a:noFill/>
-          <a:ln/>
-        </p:spPr>
-        <p:txBody>
-          <a:bodyPr wrap="square" lIns="0" tIns="0" rIns="0" bIns="0" rtlCol="0" anchor="ctr"/>
-          <a:lstStyle/>
-          <a:p>
-            <a:pPr indent="0" marL="0">
-              <a:buNone/>
-            </a:pPr>
-            <a:r>
-              <a:rPr lang="en-US" sz="1200" b="1" dirty="0">
-                <a:solidFill>
-                  <a:srgbClr val="434A63"/>
-                </a:solidFill>
-                <a:latin typeface="Arial" pitchFamily="34" charset="0"/>
-                <a:ea typeface="Arial" pitchFamily="34" charset="-122"/>
-                <a:cs typeface="Arial" pitchFamily="34" charset="-120"/>
-              </a:rPr>
-              <a:t>Nächster Termin: Montag, 7. September, 18:00 Uhr – Virtualisierung.</a:t>
-            </a:r>
-            <a:endParaRPr lang="en-US" sz="1200" dirty="0"/>
-          </a:p>
-        </p:txBody>
-      </p:sp>
-      <p:sp>
-        <p:nvSpPr>
-          <p:cNvPr id="20" name="Shape 18"/>
-          <p:cNvSpPr/>
-          <p:nvPr/>
-        </p:nvSpPr>
-        <p:spPr>
-          <a:xfrm>
-            <a:off x="566928" y="4631436"/>
-            <a:ext cx="8010144" cy="0"/>
-          </a:xfrm>
-          <a:prstGeom prst="line">
-            <a:avLst/>
-          </a:prstGeom>
-          <a:noFill/>
-          <a:ln w="9525">
-            <a:solidFill>
-              <a:srgbClr val="DFE3F0"/>
-            </a:solidFill>
-            <a:prstDash val="solid"/>
-          </a:ln>
-        </p:spPr>
-      </p:sp>
-      <p:sp>
-        <p:nvSpPr>
-          <p:cNvPr id="21" name="Text 19"/>
-          <p:cNvSpPr/>
-          <p:nvPr/>
-        </p:nvSpPr>
-        <p:spPr>
-          <a:xfrm>
-            <a:off x="566928" y="4722876"/>
-            <a:ext cx="5029200" cy="237744"/>
-          </a:xfrm>
-          <a:prstGeom prst="rect">
-            <a:avLst/>
-          </a:prstGeom>
-          <a:noFill/>
-          <a:ln/>
-        </p:spPr>
-        <p:txBody>
-          <a:bodyPr wrap="square" lIns="0" tIns="0" rIns="0" bIns="0" rtlCol="0" anchor="ctr"/>
-          <a:lstStyle/>
-          <a:p>
-            <a:pPr indent="0" marL="0">
-              <a:buNone/>
-            </a:pPr>
-            <a:r>
-              <a:rPr lang="en-US" sz="1050" spc="30" kern="0" dirty="0">
-                <a:solidFill>
-                  <a:srgbClr val="5C6377"/>
-                </a:solidFill>
-                <a:latin typeface="Arial" pitchFamily="34" charset="0"/>
-                <a:ea typeface="Arial" pitchFamily="34" charset="-122"/>
-                <a:cs typeface="Arial" pitchFamily="34" charset="-120"/>
-              </a:rPr>
-              <a:t>Abschluss</a:t>
-            </a:r>
-            <a:endParaRPr lang="en-US" sz="1050" dirty="0"/>
-          </a:p>
-        </p:txBody>
-      </p:sp>
-      <p:sp>
-        <p:nvSpPr>
-          <p:cNvPr id="22" name="Text 20"/>
-          <p:cNvSpPr/>
-          <p:nvPr/>
-        </p:nvSpPr>
-        <p:spPr>
-          <a:xfrm>
-            <a:off x="8028432" y="4722876"/>
-            <a:ext cx="548640" cy="237744"/>
-          </a:xfrm>
-          <a:prstGeom prst="rect">
-            <a:avLst/>
-          </a:prstGeom>
-          <a:noFill/>
-          <a:ln/>
-        </p:spPr>
-        <p:txBody>
-          <a:bodyPr wrap="square" lIns="0" tIns="0" rIns="0" bIns="0" rtlCol="0" anchor="ctr"/>
-          <a:lstStyle/>
-          <a:p>
-            <a:pPr algn="r" indent="0" marL="0">
-              <a:buNone/>
-            </a:pPr>
-            <a:r>
-              <a:rPr lang="en-US" sz="1050" dirty="0">
-                <a:solidFill>
-                  <a:srgbClr val="5C6377"/>
-                </a:solidFill>
-                <a:latin typeface="Arial" pitchFamily="34" charset="0"/>
-                <a:ea typeface="Arial" pitchFamily="34" charset="-122"/>
-                <a:cs typeface="Arial" pitchFamily="34" charset="-120"/>
-              </a:rPr>
-              <a:t>31/31</a:t>
-            </a:r>
-            <a:endParaRPr lang="en-US" sz="1050" dirty="0"/>
-          </a:p>
-        </p:txBody>
-      </p:sp>
-    </p:spTree>
-  </p:cSld>
-  <p:clrMapOvr>
-    <a:masterClrMapping/>
-  </p:clrMapOvr>
-</p:sld>
-</file>
-
-<file path=ppt/slides/slide37.xml><?xml version="1.0" encoding="utf-8"?>
-<p:sld xmlns:a="http://schemas.openxmlformats.org/drawingml/2006/main" xmlns:r="http://schemas.openxmlformats.org/officeDocument/2006/relationships" xmlns:p="http://schemas.openxmlformats.org/presentationml/2006/main">
-  <p:cSld name="Slide 37">
     <p:bg>
       <p:bgPr>
         <a:solidFill>
@@ -16769,7 +16425,7 @@
                 <a:ea typeface="Arial" pitchFamily="34" charset="-122"/>
                 <a:cs typeface="Arial" pitchFamily="34" charset="-120"/>
               </a:rPr>
-              <a:t>3/31</a:t>
+              <a:t>3/30</a:t>
             </a:r>
             <a:endParaRPr lang="en-US" sz="1050" dirty="0"/>
           </a:p>
@@ -17292,7 +16948,7 @@
                 <a:ea typeface="Arial" pitchFamily="34" charset="-122"/>
                 <a:cs typeface="Arial" pitchFamily="34" charset="-120"/>
               </a:rPr>
-              <a:t>4/31</a:t>
+              <a:t>4/30</a:t>
             </a:r>
             <a:endParaRPr lang="en-US" sz="1050" dirty="0"/>
           </a:p>
@@ -17606,7 +17262,7 @@
                 <a:ea typeface="Arial" pitchFamily="34" charset="-122"/>
                 <a:cs typeface="Arial" pitchFamily="34" charset="-120"/>
               </a:rPr>
-              <a:t>5/31</a:t>
+              <a:t>5/30</a:t>
             </a:r>
             <a:endParaRPr lang="en-US" sz="1050" dirty="0"/>
           </a:p>
@@ -17920,7 +17576,7 @@
                 <a:ea typeface="Arial" pitchFamily="34" charset="-122"/>
                 <a:cs typeface="Arial" pitchFamily="34" charset="-120"/>
               </a:rPr>
-              <a:t>6/31</a:t>
+              <a:t>6/30</a:t>
             </a:r>
             <a:endParaRPr lang="en-US" sz="1050" dirty="0"/>
           </a:p>
@@ -18234,7 +17890,7 @@
                 <a:ea typeface="Arial" pitchFamily="34" charset="-122"/>
                 <a:cs typeface="Arial" pitchFamily="34" charset="-120"/>
               </a:rPr>
-              <a:t>7/31</a:t>
+              <a:t>7/30</a:t>
             </a:r>
             <a:endParaRPr lang="en-US" sz="1050" dirty="0"/>
           </a:p>

--- a/folien/03-routing-vlan-sicherheit.pptx
+++ b/folien/03-routing-vlan-sicherheit.pptx
@@ -41,9 +41,10 @@
     <p:sldId id="289" r:id="rId35"/>
     <p:sldId id="290" r:id="rId36"/>
     <p:sldId id="291" r:id="rId37"/>
+    <p:sldId id="292" r:id="rId38"/>
   </p:sldIdLst>
   <p:notesMasterIdLst>
-    <p:notesMasterId r:id="rId38"/>
+    <p:notesMasterId r:id="rId39"/>
   </p:notesMasterIdLst>
   <p:sldSz cx="9144000" cy="5143500"/>
   <p:notesSz cx="5143500" cy="9144000"/>
@@ -3113,6 +3114,94 @@
             <a:fld id="{F7021451-1387-4CA6-816F-3879F97B5CBC}" type="slidenum">
               <a:rPr lang="en-US"/>
               <a:t>36</a:t>
+            </a:fld>
+            <a:endParaRPr lang="en-US"/>
+          </a:p>
+        </p:txBody>
+      </p:sp>
+    </p:spTree>
+    <p:extLst>
+      <p:ext uri="{BB962C8B-B14F-4D97-AF65-F5344CB8AC3E}">
+        <p14:creationId xmlns:p14="http://schemas.microsoft.com/office/powerpoint/2010/main" val="1024086991"/>
+      </p:ext>
+    </p:extLst>
+  </p:cSld>
+  <p:clrMapOvr>
+    <a:masterClrMapping/>
+  </p:clrMapOvr>
+</p:notes>
+</file>
+
+<file path=ppt/notesSlides/notesSlide37.xml><?xml version="1.0" encoding="utf-8"?>
+<p:notes xmlns:a="http://schemas.openxmlformats.org/drawingml/2006/main" xmlns:r="http://schemas.openxmlformats.org/officeDocument/2006/relationships" xmlns:p="http://schemas.openxmlformats.org/presentationml/2006/main">
+  <p:cSld>
+    <p:spTree>
+      <p:nvGrpSpPr>
+        <p:cNvPr id="1" name=""/>
+        <p:cNvGrpSpPr/>
+        <p:nvPr/>
+      </p:nvGrpSpPr>
+      <p:grpSpPr>
+        <a:xfrm>
+          <a:off x="0" y="0"/>
+          <a:ext cx="0" cy="0"/>
+          <a:chOff x="0" y="0"/>
+          <a:chExt cx="0" cy="0"/>
+        </a:xfrm>
+      </p:grpSpPr>
+      <p:sp>
+        <p:nvSpPr>
+          <p:cNvPr id="2" name="Slide Image Placeholder 1"/>
+          <p:cNvSpPr>
+            <a:spLocks noGrp="1" noRot="1" noChangeAspect="1"/>
+          </p:cNvSpPr>
+          <p:nvPr>
+            <p:ph type="sldImg"/>
+          </p:nvPr>
+        </p:nvSpPr>
+        <p:spPr/>
+      </p:sp>
+      <p:sp>
+        <p:nvSpPr>
+          <p:cNvPr id="3" name="Notes Placeholder 2"/>
+          <p:cNvSpPr>
+            <a:spLocks noGrp="1"/>
+          </p:cNvSpPr>
+          <p:nvPr>
+            <p:ph type="body" idx="1"/>
+          </p:nvPr>
+        </p:nvSpPr>
+        <p:spPr/>
+        <p:txBody>
+          <a:bodyPr/>
+          <a:lstStyle/>
+          <a:p>
+            <a:r>
+              <a:rPr lang="en-US" dirty="0"/>
+              <a:t/>
+            </a:r>
+            <a:endParaRPr lang="en-US" dirty="0"/>
+          </a:p>
+        </p:txBody>
+      </p:sp>
+      <p:sp>
+        <p:nvSpPr>
+          <p:cNvPr id="4" name="Slide Number Placeholder 3"/>
+          <p:cNvSpPr>
+            <a:spLocks noGrp="1"/>
+          </p:cNvSpPr>
+          <p:nvPr>
+            <p:ph type="sldNum" sz="quarter" idx="10"/>
+          </p:nvPr>
+        </p:nvSpPr>
+        <p:spPr/>
+        <p:txBody>
+          <a:bodyPr/>
+          <a:lstStyle/>
+          <a:p>
+            <a:fld id="{F7021451-1387-4CA6-816F-3879F97B5CBC}" type="slidenum">
+              <a:rPr lang="en-US"/>
+              <a:t>37</a:t>
             </a:fld>
             <a:endParaRPr lang="en-US"/>
           </a:p>
@@ -4521,7 +4610,7 @@
                 <a:ea typeface="Arial" pitchFamily="34" charset="-122"/>
                 <a:cs typeface="Arial" pitchFamily="34" charset="-120"/>
               </a:rPr>
-              <a:t>8/30</a:t>
+              <a:t>8/31</a:t>
             </a:r>
             <a:endParaRPr lang="en-US" sz="1050" dirty="0"/>
           </a:p>
@@ -4835,7 +4924,7 @@
                 <a:ea typeface="Arial" pitchFamily="34" charset="-122"/>
                 <a:cs typeface="Arial" pitchFamily="34" charset="-120"/>
               </a:rPr>
-              <a:t>9/30</a:t>
+              <a:t>9/31</a:t>
             </a:r>
             <a:endParaRPr lang="en-US" sz="1050" dirty="0"/>
           </a:p>
@@ -5149,7 +5238,7 @@
                 <a:ea typeface="Arial" pitchFamily="34" charset="-122"/>
                 <a:cs typeface="Arial" pitchFamily="34" charset="-120"/>
               </a:rPr>
-              <a:t>10/30</a:t>
+              <a:t>10/31</a:t>
             </a:r>
             <a:endParaRPr lang="en-US" sz="1050" dirty="0"/>
           </a:p>
@@ -5463,7 +5552,7 @@
                 <a:ea typeface="Arial" pitchFamily="34" charset="-122"/>
                 <a:cs typeface="Arial" pitchFamily="34" charset="-120"/>
               </a:rPr>
-              <a:t>11/30</a:t>
+              <a:t>11/31</a:t>
             </a:r>
             <a:endParaRPr lang="en-US" sz="1050" dirty="0"/>
           </a:p>
@@ -5777,7 +5866,7 @@
                 <a:ea typeface="Arial" pitchFamily="34" charset="-122"/>
                 <a:cs typeface="Arial" pitchFamily="34" charset="-120"/>
               </a:rPr>
-              <a:t>12/30</a:t>
+              <a:t>12/31</a:t>
             </a:r>
             <a:endParaRPr lang="en-US" sz="1050" dirty="0"/>
           </a:p>
@@ -6091,7 +6180,7 @@
                 <a:ea typeface="Arial" pitchFamily="34" charset="-122"/>
                 <a:cs typeface="Arial" pitchFamily="34" charset="-120"/>
               </a:rPr>
-              <a:t>13/30</a:t>
+              <a:t>13/31</a:t>
             </a:r>
             <a:endParaRPr lang="en-US" sz="1050" dirty="0"/>
           </a:p>
@@ -6614,7 +6703,7 @@
                 <a:ea typeface="Arial" pitchFamily="34" charset="-122"/>
                 <a:cs typeface="Arial" pitchFamily="34" charset="-120"/>
               </a:rPr>
-              <a:t>14/30</a:t>
+              <a:t>14/31</a:t>
             </a:r>
             <a:endParaRPr lang="en-US" sz="1050" dirty="0"/>
           </a:p>
@@ -6928,7 +7017,7 @@
                 <a:ea typeface="Arial" pitchFamily="34" charset="-122"/>
                 <a:cs typeface="Arial" pitchFamily="34" charset="-120"/>
               </a:rPr>
-              <a:t>15/30</a:t>
+              <a:t>15/31</a:t>
             </a:r>
             <a:endParaRPr lang="en-US" sz="1050" dirty="0"/>
           </a:p>
@@ -7274,7 +7363,7 @@
                 <a:ea typeface="Arial" pitchFamily="34" charset="-122"/>
                 <a:cs typeface="Arial" pitchFamily="34" charset="-120"/>
               </a:rPr>
-              <a:t>16/30</a:t>
+              <a:t>16/31</a:t>
             </a:r>
             <a:endParaRPr lang="en-US" sz="1050" dirty="0"/>
           </a:p>
@@ -8444,7 +8533,7 @@
                 <a:ea typeface="Arial" pitchFamily="34" charset="-122"/>
                 <a:cs typeface="Arial" pitchFamily="34" charset="-120"/>
               </a:rPr>
-              <a:t>1/30</a:t>
+              <a:t>1/31</a:t>
             </a:r>
             <a:endParaRPr lang="en-US" sz="1050" dirty="0"/>
           </a:p>
@@ -8758,7 +8847,7 @@
                 <a:ea typeface="Arial" pitchFamily="34" charset="-122"/>
                 <a:cs typeface="Arial" pitchFamily="34" charset="-120"/>
               </a:rPr>
-              <a:t>17/30</a:t>
+              <a:t>17/31</a:t>
             </a:r>
             <a:endParaRPr lang="en-US" sz="1050" dirty="0"/>
           </a:p>
@@ -9104,7 +9193,7 @@
                 <a:ea typeface="Arial" pitchFamily="34" charset="-122"/>
                 <a:cs typeface="Arial" pitchFamily="34" charset="-120"/>
               </a:rPr>
-              <a:t>18/30</a:t>
+              <a:t>18/31</a:t>
             </a:r>
             <a:endParaRPr lang="en-US" sz="1050" dirty="0"/>
           </a:p>
@@ -9418,7 +9507,7 @@
                 <a:ea typeface="Arial" pitchFamily="34" charset="-122"/>
                 <a:cs typeface="Arial" pitchFamily="34" charset="-120"/>
               </a:rPr>
-              <a:t>19/30</a:t>
+              <a:t>19/31</a:t>
             </a:r>
             <a:endParaRPr lang="en-US" sz="1050" dirty="0"/>
           </a:p>
@@ -10572,7 +10661,7 @@
                 <a:ea typeface="Arial" pitchFamily="34" charset="-122"/>
                 <a:cs typeface="Arial" pitchFamily="34" charset="-120"/>
               </a:rPr>
-              <a:t>20/30</a:t>
+              <a:t>20/31</a:t>
             </a:r>
             <a:endParaRPr lang="en-US" sz="1050" dirty="0"/>
           </a:p>
@@ -11146,7 +11235,7 @@
                 <a:ea typeface="Arial" pitchFamily="34" charset="-122"/>
                 <a:cs typeface="Arial" pitchFamily="34" charset="-120"/>
               </a:rPr>
-              <a:t>21/30</a:t>
+              <a:t>21/31</a:t>
             </a:r>
             <a:endParaRPr lang="en-US" sz="1050" dirty="0"/>
           </a:p>
@@ -11811,7 +11900,7 @@
                 <a:ea typeface="Arial" pitchFamily="34" charset="-122"/>
                 <a:cs typeface="Arial" pitchFamily="34" charset="-120"/>
               </a:rPr>
-              <a:t>22/30</a:t>
+              <a:t>22/31</a:t>
             </a:r>
             <a:endParaRPr lang="en-US" sz="1050" dirty="0"/>
           </a:p>
@@ -12629,7 +12718,7 @@
                 <a:ea typeface="Arial" pitchFamily="34" charset="-122"/>
                 <a:cs typeface="Arial" pitchFamily="34" charset="-120"/>
               </a:rPr>
-              <a:t>23/30</a:t>
+              <a:t>23/31</a:t>
             </a:r>
             <a:endParaRPr lang="en-US" sz="1050" dirty="0"/>
           </a:p>
@@ -12990,8 +13079,8 @@
         </p:blipFill>
         <p:spPr>
           <a:xfrm>
-            <a:off x="566928" y="1572768"/>
-            <a:ext cx="8010144" cy="2340864"/>
+            <a:off x="566928" y="1600200"/>
+            <a:ext cx="8010144" cy="2286000"/>
           </a:xfrm>
           <a:prstGeom prst="rect">
             <a:avLst/>
@@ -13093,7 +13182,7 @@
                 <a:ea typeface="Arial" pitchFamily="34" charset="-122"/>
                 <a:cs typeface="Arial" pitchFamily="34" charset="-120"/>
               </a:rPr>
-              <a:t>24/30</a:t>
+              <a:t>24/31</a:t>
             </a:r>
             <a:endParaRPr lang="en-US" sz="1050" dirty="0"/>
           </a:p>
@@ -13439,7 +13528,7 @@
                 <a:ea typeface="Arial" pitchFamily="34" charset="-122"/>
                 <a:cs typeface="Arial" pitchFamily="34" charset="-120"/>
               </a:rPr>
-              <a:t>2/30</a:t>
+              <a:t>2/31</a:t>
             </a:r>
             <a:endParaRPr lang="en-US" sz="1050" dirty="0"/>
           </a:p>
@@ -13530,7 +13619,7 @@
                 <a:ea typeface="Arial" pitchFamily="34" charset="-122"/>
                 <a:cs typeface="Arial" pitchFamily="34" charset="-120"/>
               </a:rPr>
-              <a:t>STATION 1 VON 4</a:t>
+              <a:t>STATION 1 VON 5</a:t>
             </a:r>
             <a:endParaRPr lang="en-US" sz="1150" dirty="0"/>
           </a:p>
@@ -13591,8 +13680,8 @@
         </p:blipFill>
         <p:spPr>
           <a:xfrm>
-            <a:off x="566928" y="1572768"/>
-            <a:ext cx="8010144" cy="2340864"/>
+            <a:off x="566928" y="1600200"/>
+            <a:ext cx="8010144" cy="2286000"/>
           </a:xfrm>
           <a:prstGeom prst="rect">
             <a:avLst/>
@@ -13694,7 +13783,7 @@
                 <a:ea typeface="Arial" pitchFamily="34" charset="-122"/>
                 <a:cs typeface="Arial" pitchFamily="34" charset="-120"/>
               </a:rPr>
-              <a:t>25/30</a:t>
+              <a:t>25/31</a:t>
             </a:r>
             <a:endParaRPr lang="en-US" sz="1050" dirty="0"/>
           </a:p>
@@ -13785,7 +13874,7 @@
                 <a:ea typeface="Arial" pitchFamily="34" charset="-122"/>
                 <a:cs typeface="Arial" pitchFamily="34" charset="-120"/>
               </a:rPr>
-              <a:t>STATION 2 VON 4</a:t>
+              <a:t>STATION 2 VON 5</a:t>
             </a:r>
             <a:endParaRPr lang="en-US" sz="1150" dirty="0"/>
           </a:p>
@@ -13846,8 +13935,8 @@
         </p:blipFill>
         <p:spPr>
           <a:xfrm>
-            <a:off x="566928" y="1572768"/>
-            <a:ext cx="8010144" cy="2340864"/>
+            <a:off x="566928" y="1600200"/>
+            <a:ext cx="8010144" cy="2286000"/>
           </a:xfrm>
           <a:prstGeom prst="rect">
             <a:avLst/>
@@ -13949,7 +14038,7 @@
                 <a:ea typeface="Arial" pitchFamily="34" charset="-122"/>
                 <a:cs typeface="Arial" pitchFamily="34" charset="-120"/>
               </a:rPr>
-              <a:t>26/30</a:t>
+              <a:t>26/31</a:t>
             </a:r>
             <a:endParaRPr lang="en-US" sz="1050" dirty="0"/>
           </a:p>
@@ -14040,7 +14129,7 @@
                 <a:ea typeface="Arial" pitchFamily="34" charset="-122"/>
                 <a:cs typeface="Arial" pitchFamily="34" charset="-120"/>
               </a:rPr>
-              <a:t>STATION 3 VON 4</a:t>
+              <a:t>STATION 3 VON 5</a:t>
             </a:r>
             <a:endParaRPr lang="en-US" sz="1150" dirty="0"/>
           </a:p>
@@ -14101,8 +14190,8 @@
         </p:blipFill>
         <p:spPr>
           <a:xfrm>
-            <a:off x="566928" y="1572768"/>
-            <a:ext cx="8010144" cy="2340864"/>
+            <a:off x="566928" y="1600200"/>
+            <a:ext cx="8010144" cy="2286000"/>
           </a:xfrm>
           <a:prstGeom prst="rect">
             <a:avLst/>
@@ -14204,7 +14293,7 @@
                 <a:ea typeface="Arial" pitchFamily="34" charset="-122"/>
                 <a:cs typeface="Arial" pitchFamily="34" charset="-120"/>
               </a:rPr>
-              <a:t>27/30</a:t>
+              <a:t>27/31</a:t>
             </a:r>
             <a:endParaRPr lang="en-US" sz="1050" dirty="0"/>
           </a:p>
@@ -14295,7 +14384,7 @@
                 <a:ea typeface="Arial" pitchFamily="34" charset="-122"/>
                 <a:cs typeface="Arial" pitchFamily="34" charset="-120"/>
               </a:rPr>
-              <a:t>STATION 4 VON 4</a:t>
+              <a:t>STATION 4 VON 5</a:t>
             </a:r>
             <a:endParaRPr lang="en-US" sz="1150" dirty="0"/>
           </a:p>
@@ -14356,8 +14445,8 @@
         </p:blipFill>
         <p:spPr>
           <a:xfrm>
-            <a:off x="566928" y="1572768"/>
-            <a:ext cx="8010144" cy="2340864"/>
+            <a:off x="566928" y="1600200"/>
+            <a:ext cx="8010144" cy="2286000"/>
           </a:xfrm>
           <a:prstGeom prst="rect">
             <a:avLst/>
@@ -14367,65 +14456,6 @@
       <p:sp>
         <p:nvSpPr>
           <p:cNvPr id="6" name="Shape 3"/>
-          <p:cNvSpPr/>
-          <p:nvPr/>
-        </p:nvSpPr>
-        <p:spPr>
-          <a:xfrm>
-            <a:off x="566928" y="4178808"/>
-            <a:ext cx="32004" cy="256032"/>
-          </a:xfrm>
-          <a:prstGeom prst="rect">
-            <a:avLst/>
-          </a:prstGeom>
-          <a:solidFill>
-            <a:srgbClr val="3843AF"/>
-          </a:solidFill>
-          <a:ln/>
-        </p:spPr>
-      </p:sp>
-      <p:sp>
-        <p:nvSpPr>
-          <p:cNvPr id="7" name="Text 4"/>
-          <p:cNvSpPr/>
-          <p:nvPr/>
-        </p:nvSpPr>
-        <p:spPr>
-          <a:xfrm>
-            <a:off x="749808" y="4133088"/>
-            <a:ext cx="7827264" cy="402336"/>
-          </a:xfrm>
-          <a:prstGeom prst="rect">
-            <a:avLst/>
-          </a:prstGeom>
-          <a:noFill/>
-          <a:ln/>
-        </p:spPr>
-        <p:txBody>
-          <a:bodyPr wrap="square" lIns="0" tIns="0" rIns="0" bIns="0" rtlCol="0" anchor="ctr"/>
-          <a:lstStyle/>
-          <a:p>
-            <a:pPr indent="0" marL="0">
-              <a:buNone/>
-            </a:pPr>
-            <a:r>
-              <a:rPr lang="en-US" sz="1200" b="1" dirty="0">
-                <a:solidFill>
-                  <a:srgbClr val="434A63"/>
-                </a:solidFill>
-                <a:latin typeface="Arial" pitchFamily="34" charset="0"/>
-                <a:ea typeface="Arial" pitchFamily="34" charset="-122"/>
-                <a:cs typeface="Arial" pitchFamily="34" charset="-120"/>
-              </a:rPr>
-              <a:t>Vom ersten Abend bis heute: Modell, Adressen, Weg, Trennung – alles steckt in dieser einen Antwort.</a:t>
-            </a:r>
-            <a:endParaRPr lang="en-US" sz="1200" dirty="0"/>
-          </a:p>
-        </p:txBody>
-      </p:sp>
-      <p:sp>
-        <p:nvSpPr>
-          <p:cNvPr id="8" name="Shape 5"/>
           <p:cNvSpPr/>
           <p:nvPr/>
         </p:nvSpPr>
@@ -14448,7 +14478,7 @@
       </p:sp>
       <p:sp>
         <p:nvSpPr>
-          <p:cNvPr id="9" name="Text 6"/>
+          <p:cNvPr id="7" name="Text 4"/>
           <p:cNvSpPr/>
           <p:nvPr/>
         </p:nvSpPr>
@@ -14487,7 +14517,7 @@
       </p:sp>
       <p:sp>
         <p:nvSpPr>
-          <p:cNvPr id="10" name="Text 7"/>
+          <p:cNvPr id="8" name="Text 5"/>
           <p:cNvSpPr/>
           <p:nvPr/>
         </p:nvSpPr>
@@ -14518,7 +14548,7 @@
                 <a:ea typeface="Arial" pitchFamily="34" charset="-122"/>
                 <a:cs typeface="Arial" pitchFamily="34" charset="-120"/>
               </a:rPr>
-              <a:t>28/30</a:t>
+              <a:t>28/31</a:t>
             </a:r>
             <a:endParaRPr lang="en-US" sz="1050" dirty="0"/>
           </a:p>
@@ -14609,7 +14639,7 @@
                 <a:ea typeface="Arial" pitchFamily="34" charset="-122"/>
                 <a:cs typeface="Arial" pitchFamily="34" charset="-120"/>
               </a:rPr>
-              <a:t>DREI ABENDE, EIN WERKZEUGKASTEN</a:t>
+              <a:t>STATION 5 VON 5</a:t>
             </a:r>
             <a:endParaRPr lang="en-US" sz="1150" dirty="0"/>
           </a:p>
@@ -14648,42 +14678,46 @@
                 <a:ea typeface="Arial" pitchFamily="34" charset="-122"/>
                 <a:cs typeface="Arial" pitchFamily="34" charset="-120"/>
               </a:rPr>
-              <a:t>Was der Netzwerkblock euch gegeben hat</a:t>
+              <a:t>Die Leitfrage vom ersten Abend</a:t>
             </a:r>
             <a:endParaRPr lang="en-US" sz="2600" dirty="0"/>
           </a:p>
         </p:txBody>
       </p:sp>
-      <p:sp>
-        <p:nvSpPr>
-          <p:cNvPr id="5" name="Shape 3"/>
-          <p:cNvSpPr/>
-          <p:nvPr/>
-        </p:nvSpPr>
-        <p:spPr>
-          <a:xfrm>
-            <a:off x="566928" y="1783080"/>
-            <a:ext cx="2523744" cy="1965960"/>
-          </a:xfrm>
-          <a:prstGeom prst="rect">
-            <a:avLst/>
-          </a:prstGeom>
-          <a:solidFill>
-            <a:srgbClr val="F5F6FC"/>
-          </a:solidFill>
-          <a:ln/>
-        </p:spPr>
-      </p:sp>
-      <p:sp>
-        <p:nvSpPr>
-          <p:cNvPr id="6" name="Shape 4"/>
-          <p:cNvSpPr/>
-          <p:nvPr/>
-        </p:nvSpPr>
-        <p:spPr>
-          <a:xfrm>
-            <a:off x="566928" y="1783080"/>
-            <a:ext cx="41148" cy="1965960"/>
+      <p:pic>
+        <p:nvPicPr>
+          <p:cNvPr id="5" name="Image 0" descr="/Users/jacobmenge/Desktop/kurs-26.2b-orga/folienwerkstatt/assets/diagramme/weg-github-5.png">    </p:cNvPr>
+          <p:cNvPicPr>
+            <a:picLocks noChangeAspect="1"/>
+          </p:cNvPicPr>
+          <p:nvPr/>
+        </p:nvPicPr>
+        <p:blipFill>
+          <a:blip r:embed="rId1"/>
+          <a:stretch>
+            <a:fillRect/>
+          </a:stretch>
+        </p:blipFill>
+        <p:spPr>
+          <a:xfrm>
+            <a:off x="566928" y="1600200"/>
+            <a:ext cx="8010144" cy="2286000"/>
+          </a:xfrm>
+          <a:prstGeom prst="rect">
+            <a:avLst/>
+          </a:prstGeom>
+        </p:spPr>
+      </p:pic>
+      <p:sp>
+        <p:nvSpPr>
+          <p:cNvPr id="6" name="Shape 3"/>
+          <p:cNvSpPr/>
+          <p:nvPr/>
+        </p:nvSpPr>
+        <p:spPr>
+          <a:xfrm>
+            <a:off x="566928" y="4178808"/>
+            <a:ext cx="32004" cy="256032"/>
           </a:xfrm>
           <a:prstGeom prst="rect">
             <a:avLst/>
@@ -14696,72 +14730,30 @@
       </p:sp>
       <p:sp>
         <p:nvSpPr>
-          <p:cNvPr id="7" name="Text 5"/>
-          <p:cNvSpPr/>
-          <p:nvPr/>
-        </p:nvSpPr>
-        <p:spPr>
-          <a:xfrm>
-            <a:off x="804672" y="1929384"/>
-            <a:ext cx="2121408" cy="256032"/>
-          </a:xfrm>
-          <a:prstGeom prst="rect">
-            <a:avLst/>
-          </a:prstGeom>
-          <a:noFill/>
-          <a:ln/>
-        </p:spPr>
-        <p:txBody>
-          <a:bodyPr wrap="square" lIns="0" tIns="0" rIns="0" bIns="0" rtlCol="0" anchor="t"/>
-          <a:lstStyle/>
-          <a:p>
-            <a:pPr indent="0" marL="0">
-              <a:buNone/>
-            </a:pPr>
-            <a:r>
-              <a:rPr lang="en-US" sz="1300" b="1" dirty="0">
-                <a:solidFill>
-                  <a:srgbClr val="272E52"/>
-                </a:solidFill>
-                <a:latin typeface="Arial" pitchFamily="34" charset="0"/>
-                <a:ea typeface="Arial" pitchFamily="34" charset="-122"/>
-                <a:cs typeface="Arial" pitchFamily="34" charset="-120"/>
-              </a:rPr>
-              <a:t>Ein Raster</a:t>
-            </a:r>
-            <a:endParaRPr lang="en-US" sz="1300" dirty="0"/>
-          </a:p>
-        </p:txBody>
-      </p:sp>
-      <p:sp>
-        <p:nvSpPr>
-          <p:cNvPr id="8" name="Text 6"/>
-          <p:cNvSpPr/>
-          <p:nvPr/>
-        </p:nvSpPr>
-        <p:spPr>
-          <a:xfrm>
-            <a:off x="804672" y="2231136"/>
-            <a:ext cx="2121408" cy="1399032"/>
-          </a:xfrm>
-          <a:prstGeom prst="rect">
-            <a:avLst/>
-          </a:prstGeom>
-          <a:noFill/>
-          <a:ln/>
-        </p:spPr>
-        <p:txBody>
-          <a:bodyPr wrap="square" lIns="0" tIns="0" rIns="0" bIns="0" rtlCol="0" anchor="t"/>
-          <a:lstStyle/>
-          <a:p>
-            <a:pPr indent="0" marL="0">
-              <a:lnSpc>
-                <a:spcPct val="92000"/>
-              </a:lnSpc>
-              <a:buNone/>
-            </a:pPr>
-            <a:r>
-              <a:rPr lang="en-US" sz="1100" dirty="0">
+          <p:cNvPr id="7" name="Text 4"/>
+          <p:cNvSpPr/>
+          <p:nvPr/>
+        </p:nvSpPr>
+        <p:spPr>
+          <a:xfrm>
+            <a:off x="749808" y="4133088"/>
+            <a:ext cx="7827264" cy="402336"/>
+          </a:xfrm>
+          <a:prstGeom prst="rect">
+            <a:avLst/>
+          </a:prstGeom>
+          <a:noFill/>
+          <a:ln/>
+        </p:spPr>
+        <p:txBody>
+          <a:bodyPr wrap="square" lIns="0" tIns="0" rIns="0" bIns="0" rtlCol="0" anchor="ctr"/>
+          <a:lstStyle/>
+          <a:p>
+            <a:pPr indent="0" marL="0">
+              <a:buNone/>
+            </a:pPr>
+            <a:r>
+              <a:rPr lang="en-US" sz="1200" b="1" dirty="0">
                 <a:solidFill>
                   <a:srgbClr val="434A63"/>
                 </a:solidFill>
@@ -14769,339 +14761,15 @@
                 <a:ea typeface="Arial" pitchFamily="34" charset="-122"/>
                 <a:cs typeface="Arial" pitchFamily="34" charset="-120"/>
               </a:rPr>
-              <a:t>Die Schichten als Suchraster: von unten nach oben, jeder Befehl beweist seine Schicht. Heute habt ihr fünf echte Fälle so gelöst.</a:t>
-            </a:r>
-            <a:endParaRPr lang="en-US" sz="1100" dirty="0"/>
-          </a:p>
-        </p:txBody>
-      </p:sp>
-      <p:sp>
-        <p:nvSpPr>
-          <p:cNvPr id="9" name="Shape 7"/>
-          <p:cNvSpPr/>
-          <p:nvPr/>
-        </p:nvSpPr>
-        <p:spPr>
-          <a:xfrm>
-            <a:off x="3310128" y="1783080"/>
-            <a:ext cx="2523744" cy="1965960"/>
-          </a:xfrm>
-          <a:prstGeom prst="rect">
-            <a:avLst/>
-          </a:prstGeom>
-          <a:solidFill>
-            <a:srgbClr val="F5F6FC"/>
-          </a:solidFill>
-          <a:ln/>
-        </p:spPr>
-      </p:sp>
-      <p:sp>
-        <p:nvSpPr>
-          <p:cNvPr id="10" name="Shape 8"/>
-          <p:cNvSpPr/>
-          <p:nvPr/>
-        </p:nvSpPr>
-        <p:spPr>
-          <a:xfrm>
-            <a:off x="3310128" y="1783080"/>
-            <a:ext cx="41148" cy="1965960"/>
-          </a:xfrm>
-          <a:prstGeom prst="rect">
-            <a:avLst/>
-          </a:prstGeom>
-          <a:solidFill>
-            <a:srgbClr val="0F7C86"/>
-          </a:solidFill>
-          <a:ln/>
-        </p:spPr>
-      </p:sp>
-      <p:sp>
-        <p:nvSpPr>
-          <p:cNvPr id="11" name="Text 9"/>
-          <p:cNvSpPr/>
-          <p:nvPr/>
-        </p:nvSpPr>
-        <p:spPr>
-          <a:xfrm>
-            <a:off x="3547872" y="1929384"/>
-            <a:ext cx="2121408" cy="256032"/>
-          </a:xfrm>
-          <a:prstGeom prst="rect">
-            <a:avLst/>
-          </a:prstGeom>
-          <a:noFill/>
-          <a:ln/>
-        </p:spPr>
-        <p:txBody>
-          <a:bodyPr wrap="square" lIns="0" tIns="0" rIns="0" bIns="0" rtlCol="0" anchor="t"/>
-          <a:lstStyle/>
-          <a:p>
-            <a:pPr indent="0" marL="0">
-              <a:buNone/>
-            </a:pPr>
-            <a:r>
-              <a:rPr lang="en-US" sz="1300" b="1" dirty="0">
-                <a:solidFill>
-                  <a:srgbClr val="272E52"/>
-                </a:solidFill>
-                <a:latin typeface="Arial" pitchFamily="34" charset="0"/>
-                <a:ea typeface="Arial" pitchFamily="34" charset="-122"/>
-                <a:cs typeface="Arial" pitchFamily="34" charset="-120"/>
-              </a:rPr>
-              <a:t>Ein Handwerk</a:t>
-            </a:r>
-            <a:endParaRPr lang="en-US" sz="1300" dirty="0"/>
-          </a:p>
-        </p:txBody>
-      </p:sp>
-      <p:sp>
-        <p:nvSpPr>
-          <p:cNvPr id="12" name="Text 10"/>
-          <p:cNvSpPr/>
-          <p:nvPr/>
-        </p:nvSpPr>
-        <p:spPr>
-          <a:xfrm>
-            <a:off x="3547872" y="2231136"/>
-            <a:ext cx="2121408" cy="1399032"/>
-          </a:xfrm>
-          <a:prstGeom prst="rect">
-            <a:avLst/>
-          </a:prstGeom>
-          <a:noFill/>
-          <a:ln/>
-        </p:spPr>
-        <p:txBody>
-          <a:bodyPr wrap="square" lIns="0" tIns="0" rIns="0" bIns="0" rtlCol="0" anchor="t"/>
-          <a:lstStyle/>
-          <a:p>
-            <a:pPr indent="0" marL="0">
-              <a:lnSpc>
-                <a:spcPct val="92000"/>
-              </a:lnSpc>
-              <a:buNone/>
-            </a:pPr>
-            <a:r>
-              <a:rPr lang="en-US" sz="1100" dirty="0">
-                <a:solidFill>
-                  <a:srgbClr val="434A63"/>
-                </a:solidFill>
-                <a:latin typeface="Arial" pitchFamily="34" charset="0"/>
-                <a:ea typeface="Arial" pitchFamily="34" charset="-122"/>
-                <a:cs typeface="Arial" pitchFamily="34" charset="-120"/>
-              </a:rPr>
-              <a:t>Subnetze rechnen und Netze planen – Maske, Blockgröße, minus zwei. Das tragt ihr in jede Infrastruktur, die noch kommt.</a:t>
-            </a:r>
-            <a:endParaRPr lang="en-US" sz="1100" dirty="0"/>
-          </a:p>
-        </p:txBody>
-      </p:sp>
-      <p:sp>
-        <p:nvSpPr>
-          <p:cNvPr id="13" name="Shape 11"/>
-          <p:cNvSpPr/>
-          <p:nvPr/>
-        </p:nvSpPr>
-        <p:spPr>
-          <a:xfrm>
-            <a:off x="6053328" y="1783080"/>
-            <a:ext cx="2523744" cy="1965960"/>
-          </a:xfrm>
-          <a:prstGeom prst="rect">
-            <a:avLst/>
-          </a:prstGeom>
-          <a:solidFill>
-            <a:srgbClr val="F5F6FC"/>
-          </a:solidFill>
-          <a:ln/>
-        </p:spPr>
-      </p:sp>
-      <p:sp>
-        <p:nvSpPr>
-          <p:cNvPr id="14" name="Shape 12"/>
-          <p:cNvSpPr/>
-          <p:nvPr/>
-        </p:nvSpPr>
-        <p:spPr>
-          <a:xfrm>
-            <a:off x="6053328" y="1783080"/>
-            <a:ext cx="41148" cy="1965960"/>
-          </a:xfrm>
-          <a:prstGeom prst="rect">
-            <a:avLst/>
-          </a:prstGeom>
-          <a:solidFill>
-            <a:srgbClr val="9A6310"/>
-          </a:solidFill>
-          <a:ln/>
-        </p:spPr>
-      </p:sp>
-      <p:sp>
-        <p:nvSpPr>
-          <p:cNvPr id="15" name="Text 13"/>
-          <p:cNvSpPr/>
-          <p:nvPr/>
-        </p:nvSpPr>
-        <p:spPr>
-          <a:xfrm>
-            <a:off x="6291072" y="1929384"/>
-            <a:ext cx="2121408" cy="256032"/>
-          </a:xfrm>
-          <a:prstGeom prst="rect">
-            <a:avLst/>
-          </a:prstGeom>
-          <a:noFill/>
-          <a:ln/>
-        </p:spPr>
-        <p:txBody>
-          <a:bodyPr wrap="square" lIns="0" tIns="0" rIns="0" bIns="0" rtlCol="0" anchor="t"/>
-          <a:lstStyle/>
-          <a:p>
-            <a:pPr indent="0" marL="0">
-              <a:buNone/>
-            </a:pPr>
-            <a:r>
-              <a:rPr lang="en-US" sz="1300" b="1" dirty="0">
-                <a:solidFill>
-                  <a:srgbClr val="272E52"/>
-                </a:solidFill>
-                <a:latin typeface="Arial" pitchFamily="34" charset="0"/>
-                <a:ea typeface="Arial" pitchFamily="34" charset="-122"/>
-                <a:cs typeface="Arial" pitchFamily="34" charset="-120"/>
-              </a:rPr>
-              <a:t>Ein Muster</a:t>
-            </a:r>
-            <a:endParaRPr lang="en-US" sz="1300" dirty="0"/>
-          </a:p>
-        </p:txBody>
-      </p:sp>
-      <p:sp>
-        <p:nvSpPr>
-          <p:cNvPr id="16" name="Text 14"/>
-          <p:cNvSpPr/>
-          <p:nvPr/>
-        </p:nvSpPr>
-        <p:spPr>
-          <a:xfrm>
-            <a:off x="6291072" y="2231136"/>
-            <a:ext cx="2121408" cy="1399032"/>
-          </a:xfrm>
-          <a:prstGeom prst="rect">
-            <a:avLst/>
-          </a:prstGeom>
-          <a:noFill/>
-          <a:ln/>
-        </p:spPr>
-        <p:txBody>
-          <a:bodyPr wrap="square" lIns="0" tIns="0" rIns="0" bIns="0" rtlCol="0" anchor="t"/>
-          <a:lstStyle/>
-          <a:p>
-            <a:pPr indent="0" marL="0">
-              <a:lnSpc>
-                <a:spcPct val="92000"/>
-              </a:lnSpc>
-              <a:buNone/>
-            </a:pPr>
-            <a:r>
-              <a:rPr lang="en-US" sz="1100" dirty="0">
-                <a:solidFill>
-                  <a:srgbClr val="434A63"/>
-                </a:solidFill>
-                <a:latin typeface="Arial" pitchFamily="34" charset="0"/>
-                <a:ea typeface="Arial" pitchFamily="34" charset="-122"/>
-                <a:cs typeface="Arial" pitchFamily="34" charset="-120"/>
-              </a:rPr>
-              <a:t>Netze trennt man mit Absicht: VLAN, DMZ, Firewall-Regeln. Das Zonenmodell seht ihr im Sicherheitsblock wieder.</a:t>
-            </a:r>
-            <a:endParaRPr lang="en-US" sz="1100" dirty="0"/>
-          </a:p>
-        </p:txBody>
-      </p:sp>
-      <p:sp>
-        <p:nvSpPr>
-          <p:cNvPr id="17" name="Shape 15"/>
-          <p:cNvSpPr/>
-          <p:nvPr/>
-        </p:nvSpPr>
-        <p:spPr>
-          <a:xfrm>
-            <a:off x="566928" y="3877056"/>
-            <a:ext cx="8010144" cy="512064"/>
-          </a:xfrm>
-          <a:prstGeom prst="rect">
-            <a:avLst/>
-          </a:prstGeom>
-          <a:solidFill>
-            <a:srgbClr val="EEF0FB"/>
-          </a:solidFill>
-          <a:ln/>
-        </p:spPr>
-      </p:sp>
-      <p:sp>
-        <p:nvSpPr>
-          <p:cNvPr id="18" name="Shape 16"/>
-          <p:cNvSpPr/>
-          <p:nvPr/>
-        </p:nvSpPr>
-        <p:spPr>
-          <a:xfrm>
-            <a:off x="566928" y="3877056"/>
-            <a:ext cx="41148" cy="512064"/>
-          </a:xfrm>
-          <a:prstGeom prst="rect">
-            <a:avLst/>
-          </a:prstGeom>
-          <a:solidFill>
-            <a:srgbClr val="3843AF"/>
-          </a:solidFill>
-          <a:ln/>
-        </p:spPr>
-      </p:sp>
-      <p:sp>
-        <p:nvSpPr>
-          <p:cNvPr id="19" name="Text 17"/>
-          <p:cNvSpPr/>
-          <p:nvPr/>
-        </p:nvSpPr>
-        <p:spPr>
-          <a:xfrm>
-            <a:off x="804672" y="4023360"/>
-            <a:ext cx="7607808" cy="246888"/>
-          </a:xfrm>
-          <a:prstGeom prst="rect">
-            <a:avLst/>
-          </a:prstGeom>
-          <a:noFill/>
-          <a:ln/>
-        </p:spPr>
-        <p:txBody>
-          <a:bodyPr wrap="square" lIns="0" tIns="0" rIns="0" bIns="0" rtlCol="0" anchor="t"/>
-          <a:lstStyle/>
-          <a:p>
-            <a:pPr indent="0" marL="0">
-              <a:lnSpc>
-                <a:spcPct val="92000"/>
-              </a:lnSpc>
-              <a:buNone/>
-            </a:pPr>
-            <a:r>
-              <a:rPr lang="en-US" sz="1150" dirty="0">
-                <a:solidFill>
-                  <a:srgbClr val="434A63"/>
-                </a:solidFill>
-                <a:latin typeface="Arial" pitchFamily="34" charset="0"/>
-                <a:ea typeface="Arial" pitchFamily="34" charset="-122"/>
-                <a:cs typeface="Arial" pitchFamily="34" charset="-120"/>
-              </a:rPr>
-              <a:t>Alles bleibt online zum Nachschlagen – inklusive der Seiten, die wir nicht gemeinsam behandelt haben.</a:t>
-            </a:r>
-            <a:endParaRPr lang="en-US" sz="1150" dirty="0"/>
-          </a:p>
-        </p:txBody>
-      </p:sp>
-      <p:sp>
-        <p:nvSpPr>
-          <p:cNvPr id="20" name="Shape 18"/>
+              <a:t>Vom ersten Abend bis heute: Modell, Adressen, Weg, Trennung – alles steckt in dieser einen Antwort.</a:t>
+            </a:r>
+            <a:endParaRPr lang="en-US" sz="1200" dirty="0"/>
+          </a:p>
+        </p:txBody>
+      </p:sp>
+      <p:sp>
+        <p:nvSpPr>
+          <p:cNvPr id="8" name="Shape 5"/>
           <p:cNvSpPr/>
           <p:nvPr/>
         </p:nvSpPr>
@@ -15124,7 +14792,7 @@
       </p:sp>
       <p:sp>
         <p:nvSpPr>
-          <p:cNvPr id="21" name="Text 19"/>
+          <p:cNvPr id="9" name="Text 6"/>
           <p:cNvSpPr/>
           <p:nvPr/>
         </p:nvSpPr>
@@ -15155,7 +14823,7 @@
                 <a:ea typeface="Arial" pitchFamily="34" charset="-122"/>
                 <a:cs typeface="Arial" pitchFamily="34" charset="-120"/>
               </a:rPr>
-              <a:t>Abschluss</a:t>
+              <a:t>Das Finale</a:t>
             </a:r>
             <a:endParaRPr lang="en-US" sz="1050" dirty="0"/>
           </a:p>
@@ -15163,7 +14831,7 @@
       </p:sp>
       <p:sp>
         <p:nvSpPr>
-          <p:cNvPr id="22" name="Text 20"/>
+          <p:cNvPr id="10" name="Text 7"/>
           <p:cNvSpPr/>
           <p:nvPr/>
         </p:nvSpPr>
@@ -15194,7 +14862,7 @@
                 <a:ea typeface="Arial" pitchFamily="34" charset="-122"/>
                 <a:cs typeface="Arial" pitchFamily="34" charset="-120"/>
               </a:rPr>
-              <a:t>29/30</a:t>
+              <a:t>29/31</a:t>
             </a:r>
             <a:endParaRPr lang="en-US" sz="1050" dirty="0"/>
           </a:p>
@@ -15285,7 +14953,7 @@
                 <a:ea typeface="Arial" pitchFamily="34" charset="-122"/>
                 <a:cs typeface="Arial" pitchFamily="34" charset="-120"/>
               </a:rPr>
-              <a:t>AUSBLICK</a:t>
+              <a:t>DREI ABENDE, EIN WERKZEUGKASTEN</a:t>
             </a:r>
             <a:endParaRPr lang="en-US" sz="1150" dirty="0"/>
           </a:p>
@@ -15324,7 +14992,7 @@
                 <a:ea typeface="Arial" pitchFamily="34" charset="-122"/>
                 <a:cs typeface="Arial" pitchFamily="34" charset="-120"/>
               </a:rPr>
-              <a:t>Bis Montag</a:t>
+              <a:t>Was der Netzwerkblock euch gegeben hat</a:t>
             </a:r>
             <a:endParaRPr lang="en-US" sz="2600" dirty="0"/>
           </a:p>
@@ -15332,53 +15000,14 @@
       </p:sp>
       <p:sp>
         <p:nvSpPr>
-          <p:cNvPr id="5" name="Text 3"/>
-          <p:cNvSpPr/>
-          <p:nvPr/>
-        </p:nvSpPr>
-        <p:spPr>
-          <a:xfrm>
-            <a:off x="566928" y="1444752"/>
-            <a:ext cx="8010144" cy="438912"/>
-          </a:xfrm>
-          <a:prstGeom prst="rect">
-            <a:avLst/>
-          </a:prstGeom>
-          <a:noFill/>
-          <a:ln/>
-        </p:spPr>
-        <p:txBody>
-          <a:bodyPr wrap="square" lIns="0" tIns="0" rIns="0" bIns="0" rtlCol="0" anchor="t"/>
-          <a:lstStyle/>
-          <a:p>
-            <a:pPr indent="0" marL="0">
-              <a:buNone/>
-            </a:pPr>
-            <a:r>
-              <a:rPr lang="en-US" sz="1300" dirty="0">
-                <a:solidFill>
-                  <a:srgbClr val="5C6377"/>
-                </a:solidFill>
-                <a:latin typeface="Arial" pitchFamily="34" charset="0"/>
-                <a:ea typeface="Arial" pitchFamily="34" charset="-122"/>
-                <a:cs typeface="Arial" pitchFamily="34" charset="-120"/>
-              </a:rPr>
-              <a:t>Ab Montag bauen wir – der Netzwerkblock ist geschafft.</a:t>
-            </a:r>
-            <a:endParaRPr lang="en-US" sz="1300" dirty="0"/>
-          </a:p>
-        </p:txBody>
-      </p:sp>
-      <p:sp>
-        <p:nvSpPr>
-          <p:cNvPr id="6" name="Shape 4"/>
-          <p:cNvSpPr/>
-          <p:nvPr/>
-        </p:nvSpPr>
-        <p:spPr>
-          <a:xfrm>
-            <a:off x="566928" y="1975104"/>
-            <a:ext cx="2523744" cy="1920240"/>
+          <p:cNvPr id="5" name="Shape 3"/>
+          <p:cNvSpPr/>
+          <p:nvPr/>
+        </p:nvSpPr>
+        <p:spPr>
+          <a:xfrm>
+            <a:off x="566928" y="1783080"/>
+            <a:ext cx="2523744" cy="1965960"/>
           </a:xfrm>
           <a:prstGeom prst="rect">
             <a:avLst/>
@@ -15391,14 +15020,14 @@
       </p:sp>
       <p:sp>
         <p:nvSpPr>
-          <p:cNvPr id="7" name="Shape 5"/>
-          <p:cNvSpPr/>
-          <p:nvPr/>
-        </p:nvSpPr>
-        <p:spPr>
-          <a:xfrm>
-            <a:off x="566928" y="1975104"/>
-            <a:ext cx="41148" cy="1920240"/>
+          <p:cNvPr id="6" name="Shape 4"/>
+          <p:cNvSpPr/>
+          <p:nvPr/>
+        </p:nvSpPr>
+        <p:spPr>
+          <a:xfrm>
+            <a:off x="566928" y="1783080"/>
+            <a:ext cx="41148" cy="1965960"/>
           </a:xfrm>
           <a:prstGeom prst="rect">
             <a:avLst/>
@@ -15411,53 +15040,53 @@
       </p:sp>
       <p:sp>
         <p:nvSpPr>
+          <p:cNvPr id="7" name="Text 5"/>
+          <p:cNvSpPr/>
+          <p:nvPr/>
+        </p:nvSpPr>
+        <p:spPr>
+          <a:xfrm>
+            <a:off x="804672" y="1929384"/>
+            <a:ext cx="2121408" cy="256032"/>
+          </a:xfrm>
+          <a:prstGeom prst="rect">
+            <a:avLst/>
+          </a:prstGeom>
+          <a:noFill/>
+          <a:ln/>
+        </p:spPr>
+        <p:txBody>
+          <a:bodyPr wrap="square" lIns="0" tIns="0" rIns="0" bIns="0" rtlCol="0" anchor="t"/>
+          <a:lstStyle/>
+          <a:p>
+            <a:pPr indent="0" marL="0">
+              <a:buNone/>
+            </a:pPr>
+            <a:r>
+              <a:rPr lang="en-US" sz="1300" b="1" dirty="0">
+                <a:solidFill>
+                  <a:srgbClr val="272E52"/>
+                </a:solidFill>
+                <a:latin typeface="Arial" pitchFamily="34" charset="0"/>
+                <a:ea typeface="Arial" pitchFamily="34" charset="-122"/>
+                <a:cs typeface="Arial" pitchFamily="34" charset="-120"/>
+              </a:rPr>
+              <a:t>Ein Raster</a:t>
+            </a:r>
+            <a:endParaRPr lang="en-US" sz="1300" dirty="0"/>
+          </a:p>
+        </p:txBody>
+      </p:sp>
+      <p:sp>
+        <p:nvSpPr>
           <p:cNvPr id="8" name="Text 6"/>
           <p:cNvSpPr/>
           <p:nvPr/>
         </p:nvSpPr>
         <p:spPr>
           <a:xfrm>
-            <a:off x="804672" y="2121408"/>
-            <a:ext cx="2121408" cy="256032"/>
-          </a:xfrm>
-          <a:prstGeom prst="rect">
-            <a:avLst/>
-          </a:prstGeom>
-          <a:noFill/>
-          <a:ln/>
-        </p:spPr>
-        <p:txBody>
-          <a:bodyPr wrap="square" lIns="0" tIns="0" rIns="0" bIns="0" rtlCol="0" anchor="t"/>
-          <a:lstStyle/>
-          <a:p>
-            <a:pPr indent="0" marL="0">
-              <a:buNone/>
-            </a:pPr>
-            <a:r>
-              <a:rPr lang="en-US" sz="1300" b="1" dirty="0">
-                <a:solidFill>
-                  <a:srgbClr val="272E52"/>
-                </a:solidFill>
-                <a:latin typeface="Arial" pitchFamily="34" charset="0"/>
-                <a:ea typeface="Arial" pitchFamily="34" charset="-122"/>
-                <a:cs typeface="Arial" pitchFamily="34" charset="-120"/>
-              </a:rPr>
-              <a:t>Virtualisierung</a:t>
-            </a:r>
-            <a:endParaRPr lang="en-US" sz="1300" dirty="0"/>
-          </a:p>
-        </p:txBody>
-      </p:sp>
-      <p:sp>
-        <p:nvSpPr>
-          <p:cNvPr id="9" name="Text 7"/>
-          <p:cNvSpPr/>
-          <p:nvPr/>
-        </p:nvSpPr>
-        <p:spPr>
-          <a:xfrm>
-            <a:off x="804672" y="2423160"/>
-            <a:ext cx="2121408" cy="1353312"/>
+            <a:off x="804672" y="2231136"/>
+            <a:ext cx="2121408" cy="1399032"/>
           </a:xfrm>
           <a:prstGeom prst="rect">
             <a:avLst/>
@@ -15476,7 +15105,7 @@
               <a:buNone/>
             </a:pPr>
             <a:r>
-              <a:rPr lang="en-US" sz="1150" dirty="0">
+              <a:rPr lang="en-US" sz="1100" dirty="0">
                 <a:solidFill>
                   <a:srgbClr val="434A63"/>
                 </a:solidFill>
@@ -15484,22 +15113,22 @@
                 <a:ea typeface="Arial" pitchFamily="34" charset="-122"/>
                 <a:cs typeface="Arial" pitchFamily="34" charset="-120"/>
               </a:rPr>
-              <a:t>Hypervisor, virtuelle Maschinen, virtuelle Netze – und ihr startet eure erste eigene VM. Das Werkzeug dafür richten wir gemeinsam ein.</a:t>
-            </a:r>
-            <a:endParaRPr lang="en-US" sz="1150" dirty="0"/>
-          </a:p>
-        </p:txBody>
-      </p:sp>
-      <p:sp>
-        <p:nvSpPr>
-          <p:cNvPr id="10" name="Shape 8"/>
-          <p:cNvSpPr/>
-          <p:nvPr/>
-        </p:nvSpPr>
-        <p:spPr>
-          <a:xfrm>
-            <a:off x="3310128" y="1975104"/>
-            <a:ext cx="2523744" cy="1920240"/>
+              <a:t>Die Schichten als Suchraster: von unten nach oben, jeder Befehl beweist seine Schicht. Heute habt ihr fünf echte Fälle so gelöst.</a:t>
+            </a:r>
+            <a:endParaRPr lang="en-US" sz="1100" dirty="0"/>
+          </a:p>
+        </p:txBody>
+      </p:sp>
+      <p:sp>
+        <p:nvSpPr>
+          <p:cNvPr id="9" name="Shape 7"/>
+          <p:cNvSpPr/>
+          <p:nvPr/>
+        </p:nvSpPr>
+        <p:spPr>
+          <a:xfrm>
+            <a:off x="3310128" y="1783080"/>
+            <a:ext cx="2523744" cy="1965960"/>
           </a:xfrm>
           <a:prstGeom prst="rect">
             <a:avLst/>
@@ -15512,14 +15141,256 @@
       </p:sp>
       <p:sp>
         <p:nvSpPr>
-          <p:cNvPr id="11" name="Shape 9"/>
-          <p:cNvSpPr/>
-          <p:nvPr/>
-        </p:nvSpPr>
-        <p:spPr>
-          <a:xfrm>
-            <a:off x="3310128" y="1975104"/>
-            <a:ext cx="41148" cy="1920240"/>
+          <p:cNvPr id="10" name="Shape 8"/>
+          <p:cNvSpPr/>
+          <p:nvPr/>
+        </p:nvSpPr>
+        <p:spPr>
+          <a:xfrm>
+            <a:off x="3310128" y="1783080"/>
+            <a:ext cx="41148" cy="1965960"/>
+          </a:xfrm>
+          <a:prstGeom prst="rect">
+            <a:avLst/>
+          </a:prstGeom>
+          <a:solidFill>
+            <a:srgbClr val="0F7C86"/>
+          </a:solidFill>
+          <a:ln/>
+        </p:spPr>
+      </p:sp>
+      <p:sp>
+        <p:nvSpPr>
+          <p:cNvPr id="11" name="Text 9"/>
+          <p:cNvSpPr/>
+          <p:nvPr/>
+        </p:nvSpPr>
+        <p:spPr>
+          <a:xfrm>
+            <a:off x="3547872" y="1929384"/>
+            <a:ext cx="2121408" cy="256032"/>
+          </a:xfrm>
+          <a:prstGeom prst="rect">
+            <a:avLst/>
+          </a:prstGeom>
+          <a:noFill/>
+          <a:ln/>
+        </p:spPr>
+        <p:txBody>
+          <a:bodyPr wrap="square" lIns="0" tIns="0" rIns="0" bIns="0" rtlCol="0" anchor="t"/>
+          <a:lstStyle/>
+          <a:p>
+            <a:pPr indent="0" marL="0">
+              <a:buNone/>
+            </a:pPr>
+            <a:r>
+              <a:rPr lang="en-US" sz="1300" b="1" dirty="0">
+                <a:solidFill>
+                  <a:srgbClr val="272E52"/>
+                </a:solidFill>
+                <a:latin typeface="Arial" pitchFamily="34" charset="0"/>
+                <a:ea typeface="Arial" pitchFamily="34" charset="-122"/>
+                <a:cs typeface="Arial" pitchFamily="34" charset="-120"/>
+              </a:rPr>
+              <a:t>Ein Handwerk</a:t>
+            </a:r>
+            <a:endParaRPr lang="en-US" sz="1300" dirty="0"/>
+          </a:p>
+        </p:txBody>
+      </p:sp>
+      <p:sp>
+        <p:nvSpPr>
+          <p:cNvPr id="12" name="Text 10"/>
+          <p:cNvSpPr/>
+          <p:nvPr/>
+        </p:nvSpPr>
+        <p:spPr>
+          <a:xfrm>
+            <a:off x="3547872" y="2231136"/>
+            <a:ext cx="2121408" cy="1399032"/>
+          </a:xfrm>
+          <a:prstGeom prst="rect">
+            <a:avLst/>
+          </a:prstGeom>
+          <a:noFill/>
+          <a:ln/>
+        </p:spPr>
+        <p:txBody>
+          <a:bodyPr wrap="square" lIns="0" tIns="0" rIns="0" bIns="0" rtlCol="0" anchor="t"/>
+          <a:lstStyle/>
+          <a:p>
+            <a:pPr indent="0" marL="0">
+              <a:lnSpc>
+                <a:spcPct val="92000"/>
+              </a:lnSpc>
+              <a:buNone/>
+            </a:pPr>
+            <a:r>
+              <a:rPr lang="en-US" sz="1100" dirty="0">
+                <a:solidFill>
+                  <a:srgbClr val="434A63"/>
+                </a:solidFill>
+                <a:latin typeface="Arial" pitchFamily="34" charset="0"/>
+                <a:ea typeface="Arial" pitchFamily="34" charset="-122"/>
+                <a:cs typeface="Arial" pitchFamily="34" charset="-120"/>
+              </a:rPr>
+              <a:t>Subnetze rechnen und Netze planen – Maske, Blockgröße, minus zwei. Das tragt ihr in jede Infrastruktur, die noch kommt.</a:t>
+            </a:r>
+            <a:endParaRPr lang="en-US" sz="1100" dirty="0"/>
+          </a:p>
+        </p:txBody>
+      </p:sp>
+      <p:sp>
+        <p:nvSpPr>
+          <p:cNvPr id="13" name="Shape 11"/>
+          <p:cNvSpPr/>
+          <p:nvPr/>
+        </p:nvSpPr>
+        <p:spPr>
+          <a:xfrm>
+            <a:off x="6053328" y="1783080"/>
+            <a:ext cx="2523744" cy="1965960"/>
+          </a:xfrm>
+          <a:prstGeom prst="rect">
+            <a:avLst/>
+          </a:prstGeom>
+          <a:solidFill>
+            <a:srgbClr val="F5F6FC"/>
+          </a:solidFill>
+          <a:ln/>
+        </p:spPr>
+      </p:sp>
+      <p:sp>
+        <p:nvSpPr>
+          <p:cNvPr id="14" name="Shape 12"/>
+          <p:cNvSpPr/>
+          <p:nvPr/>
+        </p:nvSpPr>
+        <p:spPr>
+          <a:xfrm>
+            <a:off x="6053328" y="1783080"/>
+            <a:ext cx="41148" cy="1965960"/>
+          </a:xfrm>
+          <a:prstGeom prst="rect">
+            <a:avLst/>
+          </a:prstGeom>
+          <a:solidFill>
+            <a:srgbClr val="9A6310"/>
+          </a:solidFill>
+          <a:ln/>
+        </p:spPr>
+      </p:sp>
+      <p:sp>
+        <p:nvSpPr>
+          <p:cNvPr id="15" name="Text 13"/>
+          <p:cNvSpPr/>
+          <p:nvPr/>
+        </p:nvSpPr>
+        <p:spPr>
+          <a:xfrm>
+            <a:off x="6291072" y="1929384"/>
+            <a:ext cx="2121408" cy="256032"/>
+          </a:xfrm>
+          <a:prstGeom prst="rect">
+            <a:avLst/>
+          </a:prstGeom>
+          <a:noFill/>
+          <a:ln/>
+        </p:spPr>
+        <p:txBody>
+          <a:bodyPr wrap="square" lIns="0" tIns="0" rIns="0" bIns="0" rtlCol="0" anchor="t"/>
+          <a:lstStyle/>
+          <a:p>
+            <a:pPr indent="0" marL="0">
+              <a:buNone/>
+            </a:pPr>
+            <a:r>
+              <a:rPr lang="en-US" sz="1300" b="1" dirty="0">
+                <a:solidFill>
+                  <a:srgbClr val="272E52"/>
+                </a:solidFill>
+                <a:latin typeface="Arial" pitchFamily="34" charset="0"/>
+                <a:ea typeface="Arial" pitchFamily="34" charset="-122"/>
+                <a:cs typeface="Arial" pitchFamily="34" charset="-120"/>
+              </a:rPr>
+              <a:t>Ein Muster</a:t>
+            </a:r>
+            <a:endParaRPr lang="en-US" sz="1300" dirty="0"/>
+          </a:p>
+        </p:txBody>
+      </p:sp>
+      <p:sp>
+        <p:nvSpPr>
+          <p:cNvPr id="16" name="Text 14"/>
+          <p:cNvSpPr/>
+          <p:nvPr/>
+        </p:nvSpPr>
+        <p:spPr>
+          <a:xfrm>
+            <a:off x="6291072" y="2231136"/>
+            <a:ext cx="2121408" cy="1399032"/>
+          </a:xfrm>
+          <a:prstGeom prst="rect">
+            <a:avLst/>
+          </a:prstGeom>
+          <a:noFill/>
+          <a:ln/>
+        </p:spPr>
+        <p:txBody>
+          <a:bodyPr wrap="square" lIns="0" tIns="0" rIns="0" bIns="0" rtlCol="0" anchor="t"/>
+          <a:lstStyle/>
+          <a:p>
+            <a:pPr indent="0" marL="0">
+              <a:lnSpc>
+                <a:spcPct val="92000"/>
+              </a:lnSpc>
+              <a:buNone/>
+            </a:pPr>
+            <a:r>
+              <a:rPr lang="en-US" sz="1100" dirty="0">
+                <a:solidFill>
+                  <a:srgbClr val="434A63"/>
+                </a:solidFill>
+                <a:latin typeface="Arial" pitchFamily="34" charset="0"/>
+                <a:ea typeface="Arial" pitchFamily="34" charset="-122"/>
+                <a:cs typeface="Arial" pitchFamily="34" charset="-120"/>
+              </a:rPr>
+              <a:t>Netze trennt man mit Absicht: VLAN, DMZ, Firewall-Regeln. Das Zonenmodell seht ihr im Sicherheitsblock wieder.</a:t>
+            </a:r>
+            <a:endParaRPr lang="en-US" sz="1100" dirty="0"/>
+          </a:p>
+        </p:txBody>
+      </p:sp>
+      <p:sp>
+        <p:nvSpPr>
+          <p:cNvPr id="17" name="Shape 15"/>
+          <p:cNvSpPr/>
+          <p:nvPr/>
+        </p:nvSpPr>
+        <p:spPr>
+          <a:xfrm>
+            <a:off x="566928" y="3877056"/>
+            <a:ext cx="8010144" cy="512064"/>
+          </a:xfrm>
+          <a:prstGeom prst="rect">
+            <a:avLst/>
+          </a:prstGeom>
+          <a:solidFill>
+            <a:srgbClr val="EEF0FB"/>
+          </a:solidFill>
+          <a:ln/>
+        </p:spPr>
+      </p:sp>
+      <p:sp>
+        <p:nvSpPr>
+          <p:cNvPr id="18" name="Shape 16"/>
+          <p:cNvSpPr/>
+          <p:nvPr/>
+        </p:nvSpPr>
+        <p:spPr>
+          <a:xfrm>
+            <a:off x="566928" y="3877056"/>
+            <a:ext cx="41148" cy="512064"/>
           </a:xfrm>
           <a:prstGeom prst="rect">
             <a:avLst/>
@@ -15532,53 +15403,14 @@
       </p:sp>
       <p:sp>
         <p:nvSpPr>
-          <p:cNvPr id="12" name="Text 10"/>
-          <p:cNvSpPr/>
-          <p:nvPr/>
-        </p:nvSpPr>
-        <p:spPr>
-          <a:xfrm>
-            <a:off x="3547872" y="2121408"/>
-            <a:ext cx="2121408" cy="256032"/>
-          </a:xfrm>
-          <a:prstGeom prst="rect">
-            <a:avLst/>
-          </a:prstGeom>
-          <a:noFill/>
-          <a:ln/>
-        </p:spPr>
-        <p:txBody>
-          <a:bodyPr wrap="square" lIns="0" tIns="0" rIns="0" bIns="0" rtlCol="0" anchor="t"/>
-          <a:lstStyle/>
-          <a:p>
-            <a:pPr indent="0" marL="0">
-              <a:buNone/>
-            </a:pPr>
-            <a:r>
-              <a:rPr lang="en-US" sz="1300" b="1" dirty="0">
-                <a:solidFill>
-                  <a:srgbClr val="272E52"/>
-                </a:solidFill>
-                <a:latin typeface="Arial" pitchFamily="34" charset="0"/>
-                <a:ea typeface="Arial" pitchFamily="34" charset="-122"/>
-                <a:cs typeface="Arial" pitchFamily="34" charset="-120"/>
-              </a:rPr>
-              <a:t>Nichts vorbereiten</a:t>
-            </a:r>
-            <a:endParaRPr lang="en-US" sz="1300" dirty="0"/>
-          </a:p>
-        </p:txBody>
-      </p:sp>
-      <p:sp>
-        <p:nvSpPr>
-          <p:cNvPr id="13" name="Text 11"/>
-          <p:cNvSpPr/>
-          <p:nvPr/>
-        </p:nvSpPr>
-        <p:spPr>
-          <a:xfrm>
-            <a:off x="3547872" y="2423160"/>
-            <a:ext cx="2121408" cy="1353312"/>
+          <p:cNvPr id="19" name="Text 17"/>
+          <p:cNvSpPr/>
+          <p:nvPr/>
+        </p:nvSpPr>
+        <p:spPr>
+          <a:xfrm>
+            <a:off x="804672" y="4023360"/>
+            <a:ext cx="7607808" cy="246888"/>
           </a:xfrm>
           <a:prstGeom prst="rect">
             <a:avLst/>
@@ -15605,189 +15437,9 @@
                 <a:ea typeface="Arial" pitchFamily="34" charset="-122"/>
                 <a:cs typeface="Arial" pitchFamily="34" charset="-120"/>
               </a:rPr>
-              <a:t>Ihr braucht nur euren Rechner. Wer mag, liest vorab die Seite „Virtualisierung“ auf der Kursseite an – Pflicht ist das nicht.</a:t>
+              <a:t>Alles bleibt online zum Nachschlagen – inklusive der Seiten, die wir nicht gemeinsam behandelt haben.</a:t>
             </a:r>
             <a:endParaRPr lang="en-US" sz="1150" dirty="0"/>
-          </a:p>
-        </p:txBody>
-      </p:sp>
-      <p:sp>
-        <p:nvSpPr>
-          <p:cNvPr id="14" name="Shape 12"/>
-          <p:cNvSpPr/>
-          <p:nvPr/>
-        </p:nvSpPr>
-        <p:spPr>
-          <a:xfrm>
-            <a:off x="6053328" y="1975104"/>
-            <a:ext cx="2523744" cy="1920240"/>
-          </a:xfrm>
-          <a:prstGeom prst="rect">
-            <a:avLst/>
-          </a:prstGeom>
-          <a:solidFill>
-            <a:srgbClr val="F5F6FC"/>
-          </a:solidFill>
-          <a:ln/>
-        </p:spPr>
-      </p:sp>
-      <p:sp>
-        <p:nvSpPr>
-          <p:cNvPr id="15" name="Shape 13"/>
-          <p:cNvSpPr/>
-          <p:nvPr/>
-        </p:nvSpPr>
-        <p:spPr>
-          <a:xfrm>
-            <a:off x="6053328" y="1975104"/>
-            <a:ext cx="41148" cy="1920240"/>
-          </a:xfrm>
-          <a:prstGeom prst="rect">
-            <a:avLst/>
-          </a:prstGeom>
-          <a:solidFill>
-            <a:srgbClr val="3843AF"/>
-          </a:solidFill>
-          <a:ln/>
-        </p:spPr>
-      </p:sp>
-      <p:sp>
-        <p:nvSpPr>
-          <p:cNvPr id="16" name="Text 14"/>
-          <p:cNvSpPr/>
-          <p:nvPr/>
-        </p:nvSpPr>
-        <p:spPr>
-          <a:xfrm>
-            <a:off x="6291072" y="2121408"/>
-            <a:ext cx="2121408" cy="256032"/>
-          </a:xfrm>
-          <a:prstGeom prst="rect">
-            <a:avLst/>
-          </a:prstGeom>
-          <a:noFill/>
-          <a:ln/>
-        </p:spPr>
-        <p:txBody>
-          <a:bodyPr wrap="square" lIns="0" tIns="0" rIns="0" bIns="0" rtlCol="0" anchor="t"/>
-          <a:lstStyle/>
-          <a:p>
-            <a:pPr indent="0" marL="0">
-              <a:buNone/>
-            </a:pPr>
-            <a:r>
-              <a:rPr lang="en-US" sz="1300" b="1" dirty="0">
-                <a:solidFill>
-                  <a:srgbClr val="272E52"/>
-                </a:solidFill>
-                <a:latin typeface="Arial" pitchFamily="34" charset="0"/>
-                <a:ea typeface="Arial" pitchFamily="34" charset="-122"/>
-                <a:cs typeface="Arial" pitchFamily="34" charset="-120"/>
-              </a:rPr>
-              <a:t>Offene Rechnungen</a:t>
-            </a:r>
-            <a:endParaRPr lang="en-US" sz="1300" dirty="0"/>
-          </a:p>
-        </p:txBody>
-      </p:sp>
-      <p:sp>
-        <p:nvSpPr>
-          <p:cNvPr id="17" name="Text 15"/>
-          <p:cNvSpPr/>
-          <p:nvPr/>
-        </p:nvSpPr>
-        <p:spPr>
-          <a:xfrm>
-            <a:off x="6291072" y="2423160"/>
-            <a:ext cx="2121408" cy="1353312"/>
-          </a:xfrm>
-          <a:prstGeom prst="rect">
-            <a:avLst/>
-          </a:prstGeom>
-          <a:noFill/>
-          <a:ln/>
-        </p:spPr>
-        <p:txBody>
-          <a:bodyPr wrap="square" lIns="0" tIns="0" rIns="0" bIns="0" rtlCol="0" anchor="t"/>
-          <a:lstStyle/>
-          <a:p>
-            <a:pPr indent="0" marL="0">
-              <a:lnSpc>
-                <a:spcPct val="92000"/>
-              </a:lnSpc>
-              <a:buNone/>
-            </a:pPr>
-            <a:r>
-              <a:rPr lang="en-US" sz="1150" dirty="0">
-                <a:solidFill>
-                  <a:srgbClr val="434A63"/>
-                </a:solidFill>
-                <a:latin typeface="Arial" pitchFamily="34" charset="0"/>
-                <a:ea typeface="Arial" pitchFamily="34" charset="-122"/>
-                <a:cs typeface="Arial" pitchFamily="34" charset="-120"/>
-              </a:rPr>
-              <a:t>Wer bei den Fällen 3 und 4 geschwommen ist: Die Montags-Seiten zu Adressierung und Routing schließen die Lücke.</a:t>
-            </a:r>
-            <a:endParaRPr lang="en-US" sz="1150" dirty="0"/>
-          </a:p>
-        </p:txBody>
-      </p:sp>
-      <p:sp>
-        <p:nvSpPr>
-          <p:cNvPr id="18" name="Shape 16"/>
-          <p:cNvSpPr/>
-          <p:nvPr/>
-        </p:nvSpPr>
-        <p:spPr>
-          <a:xfrm>
-            <a:off x="566928" y="4160520"/>
-            <a:ext cx="32004" cy="256032"/>
-          </a:xfrm>
-          <a:prstGeom prst="rect">
-            <a:avLst/>
-          </a:prstGeom>
-          <a:solidFill>
-            <a:srgbClr val="3843AF"/>
-          </a:solidFill>
-          <a:ln/>
-        </p:spPr>
-      </p:sp>
-      <p:sp>
-        <p:nvSpPr>
-          <p:cNvPr id="19" name="Text 17"/>
-          <p:cNvSpPr/>
-          <p:nvPr/>
-        </p:nvSpPr>
-        <p:spPr>
-          <a:xfrm>
-            <a:off x="749808" y="4114800"/>
-            <a:ext cx="7827264" cy="402336"/>
-          </a:xfrm>
-          <a:prstGeom prst="rect">
-            <a:avLst/>
-          </a:prstGeom>
-          <a:noFill/>
-          <a:ln/>
-        </p:spPr>
-        <p:txBody>
-          <a:bodyPr wrap="square" lIns="0" tIns="0" rIns="0" bIns="0" rtlCol="0" anchor="ctr"/>
-          <a:lstStyle/>
-          <a:p>
-            <a:pPr indent="0" marL="0">
-              <a:buNone/>
-            </a:pPr>
-            <a:r>
-              <a:rPr lang="en-US" sz="1200" b="1" dirty="0">
-                <a:solidFill>
-                  <a:srgbClr val="434A63"/>
-                </a:solidFill>
-                <a:latin typeface="Arial" pitchFamily="34" charset="0"/>
-                <a:ea typeface="Arial" pitchFamily="34" charset="-122"/>
-                <a:cs typeface="Arial" pitchFamily="34" charset="-120"/>
-              </a:rPr>
-              <a:t>Nächster Termin: Montag, 7. September, 18:00 Uhr – Virtualisierung.</a:t>
-            </a:r>
-            <a:endParaRPr lang="en-US" sz="1200" dirty="0"/>
           </a:p>
         </p:txBody>
       </p:sp>
@@ -15886,7 +15538,7 @@
                 <a:ea typeface="Arial" pitchFamily="34" charset="-122"/>
                 <a:cs typeface="Arial" pitchFamily="34" charset="-120"/>
               </a:rPr>
-              <a:t>30/30</a:t>
+              <a:t>30/31</a:t>
             </a:r>
             <a:endParaRPr lang="en-US" sz="1050" dirty="0"/>
           </a:p>
@@ -15903,6 +15555,698 @@
 <file path=ppt/slides/slide36.xml><?xml version="1.0" encoding="utf-8"?>
 <p:sld xmlns:a="http://schemas.openxmlformats.org/drawingml/2006/main" xmlns:r="http://schemas.openxmlformats.org/officeDocument/2006/relationships" xmlns:p="http://schemas.openxmlformats.org/presentationml/2006/main">
   <p:cSld name="Slide 36">
+    <p:bg>
+      <p:bgPr>
+        <a:solidFill>
+          <a:srgbClr val="FFFFFF"/>
+        </a:solidFill>
+      </p:bgPr>
+    </p:bg>
+    <p:spTree>
+      <p:nvGrpSpPr>
+        <p:cNvPr id="1" name=""/>
+        <p:cNvGrpSpPr/>
+        <p:nvPr/>
+      </p:nvGrpSpPr>
+      <p:grpSpPr>
+        <a:xfrm>
+          <a:off x="0" y="0"/>
+          <a:ext cx="0" cy="0"/>
+          <a:chOff x="0" y="0"/>
+          <a:chExt cx="0" cy="0"/>
+        </a:xfrm>
+      </p:grpSpPr>
+      <p:sp>
+        <p:nvSpPr>
+          <p:cNvPr id="2" name="Shape 0"/>
+          <p:cNvSpPr/>
+          <p:nvPr/>
+        </p:nvSpPr>
+        <p:spPr>
+          <a:xfrm>
+            <a:off x="566928" y="201168"/>
+            <a:ext cx="475488" cy="50292"/>
+          </a:xfrm>
+          <a:prstGeom prst="rect">
+            <a:avLst/>
+          </a:prstGeom>
+          <a:solidFill>
+            <a:srgbClr val="3843AF"/>
+          </a:solidFill>
+          <a:ln/>
+        </p:spPr>
+      </p:sp>
+      <p:sp>
+        <p:nvSpPr>
+          <p:cNvPr id="3" name="Text 1"/>
+          <p:cNvSpPr/>
+          <p:nvPr/>
+        </p:nvSpPr>
+        <p:spPr>
+          <a:xfrm>
+            <a:off x="566928" y="384048"/>
+            <a:ext cx="8010144" cy="237744"/>
+          </a:xfrm>
+          <a:prstGeom prst="rect">
+            <a:avLst/>
+          </a:prstGeom>
+          <a:noFill/>
+          <a:ln/>
+        </p:spPr>
+        <p:txBody>
+          <a:bodyPr wrap="square" lIns="0" tIns="0" rIns="0" bIns="0" rtlCol="0" anchor="ctr"/>
+          <a:lstStyle/>
+          <a:p>
+            <a:pPr indent="0" marL="0">
+              <a:buNone/>
+            </a:pPr>
+            <a:r>
+              <a:rPr lang="en-US" sz="1150" b="1" spc="180" kern="0" dirty="0">
+                <a:solidFill>
+                  <a:srgbClr val="3843AF"/>
+                </a:solidFill>
+                <a:latin typeface="Arial" pitchFamily="34" charset="0"/>
+                <a:ea typeface="Arial" pitchFamily="34" charset="-122"/>
+                <a:cs typeface="Arial" pitchFamily="34" charset="-120"/>
+              </a:rPr>
+              <a:t>AUSBLICK</a:t>
+            </a:r>
+            <a:endParaRPr lang="en-US" sz="1150" dirty="0"/>
+          </a:p>
+        </p:txBody>
+      </p:sp>
+      <p:sp>
+        <p:nvSpPr>
+          <p:cNvPr id="4" name="Text 2"/>
+          <p:cNvSpPr/>
+          <p:nvPr/>
+        </p:nvSpPr>
+        <p:spPr>
+          <a:xfrm>
+            <a:off x="566928" y="731520"/>
+            <a:ext cx="8010144" cy="603504"/>
+          </a:xfrm>
+          <a:prstGeom prst="rect">
+            <a:avLst/>
+          </a:prstGeom>
+          <a:noFill/>
+          <a:ln/>
+        </p:spPr>
+        <p:txBody>
+          <a:bodyPr wrap="square" lIns="0" tIns="0" rIns="0" bIns="0" rtlCol="0" anchor="t"/>
+          <a:lstStyle/>
+          <a:p>
+            <a:pPr indent="0" marL="0">
+              <a:buNone/>
+            </a:pPr>
+            <a:r>
+              <a:rPr lang="en-US" sz="2600" b="1" dirty="0">
+                <a:solidFill>
+                  <a:srgbClr val="272E52"/>
+                </a:solidFill>
+                <a:latin typeface="Arial" pitchFamily="34" charset="0"/>
+                <a:ea typeface="Arial" pitchFamily="34" charset="-122"/>
+                <a:cs typeface="Arial" pitchFamily="34" charset="-120"/>
+              </a:rPr>
+              <a:t>Bis Montag</a:t>
+            </a:r>
+            <a:endParaRPr lang="en-US" sz="2600" dirty="0"/>
+          </a:p>
+        </p:txBody>
+      </p:sp>
+      <p:sp>
+        <p:nvSpPr>
+          <p:cNvPr id="5" name="Text 3"/>
+          <p:cNvSpPr/>
+          <p:nvPr/>
+        </p:nvSpPr>
+        <p:spPr>
+          <a:xfrm>
+            <a:off x="566928" y="1444752"/>
+            <a:ext cx="8010144" cy="438912"/>
+          </a:xfrm>
+          <a:prstGeom prst="rect">
+            <a:avLst/>
+          </a:prstGeom>
+          <a:noFill/>
+          <a:ln/>
+        </p:spPr>
+        <p:txBody>
+          <a:bodyPr wrap="square" lIns="0" tIns="0" rIns="0" bIns="0" rtlCol="0" anchor="t"/>
+          <a:lstStyle/>
+          <a:p>
+            <a:pPr indent="0" marL="0">
+              <a:buNone/>
+            </a:pPr>
+            <a:r>
+              <a:rPr lang="en-US" sz="1300" dirty="0">
+                <a:solidFill>
+                  <a:srgbClr val="5C6377"/>
+                </a:solidFill>
+                <a:latin typeface="Arial" pitchFamily="34" charset="0"/>
+                <a:ea typeface="Arial" pitchFamily="34" charset="-122"/>
+                <a:cs typeface="Arial" pitchFamily="34" charset="-120"/>
+              </a:rPr>
+              <a:t>Ab Montag bauen wir – der Netzwerkblock ist geschafft.</a:t>
+            </a:r>
+            <a:endParaRPr lang="en-US" sz="1300" dirty="0"/>
+          </a:p>
+        </p:txBody>
+      </p:sp>
+      <p:sp>
+        <p:nvSpPr>
+          <p:cNvPr id="6" name="Shape 4"/>
+          <p:cNvSpPr/>
+          <p:nvPr/>
+        </p:nvSpPr>
+        <p:spPr>
+          <a:xfrm>
+            <a:off x="566928" y="1975104"/>
+            <a:ext cx="2523744" cy="1920240"/>
+          </a:xfrm>
+          <a:prstGeom prst="rect">
+            <a:avLst/>
+          </a:prstGeom>
+          <a:solidFill>
+            <a:srgbClr val="F5F6FC"/>
+          </a:solidFill>
+          <a:ln/>
+        </p:spPr>
+      </p:sp>
+      <p:sp>
+        <p:nvSpPr>
+          <p:cNvPr id="7" name="Shape 5"/>
+          <p:cNvSpPr/>
+          <p:nvPr/>
+        </p:nvSpPr>
+        <p:spPr>
+          <a:xfrm>
+            <a:off x="566928" y="1975104"/>
+            <a:ext cx="41148" cy="1920240"/>
+          </a:xfrm>
+          <a:prstGeom prst="rect">
+            <a:avLst/>
+          </a:prstGeom>
+          <a:solidFill>
+            <a:srgbClr val="3843AF"/>
+          </a:solidFill>
+          <a:ln/>
+        </p:spPr>
+      </p:sp>
+      <p:sp>
+        <p:nvSpPr>
+          <p:cNvPr id="8" name="Text 6"/>
+          <p:cNvSpPr/>
+          <p:nvPr/>
+        </p:nvSpPr>
+        <p:spPr>
+          <a:xfrm>
+            <a:off x="804672" y="2121408"/>
+            <a:ext cx="2121408" cy="256032"/>
+          </a:xfrm>
+          <a:prstGeom prst="rect">
+            <a:avLst/>
+          </a:prstGeom>
+          <a:noFill/>
+          <a:ln/>
+        </p:spPr>
+        <p:txBody>
+          <a:bodyPr wrap="square" lIns="0" tIns="0" rIns="0" bIns="0" rtlCol="0" anchor="t"/>
+          <a:lstStyle/>
+          <a:p>
+            <a:pPr indent="0" marL="0">
+              <a:buNone/>
+            </a:pPr>
+            <a:r>
+              <a:rPr lang="en-US" sz="1300" b="1" dirty="0">
+                <a:solidFill>
+                  <a:srgbClr val="272E52"/>
+                </a:solidFill>
+                <a:latin typeface="Arial" pitchFamily="34" charset="0"/>
+                <a:ea typeface="Arial" pitchFamily="34" charset="-122"/>
+                <a:cs typeface="Arial" pitchFamily="34" charset="-120"/>
+              </a:rPr>
+              <a:t>Virtualisierung</a:t>
+            </a:r>
+            <a:endParaRPr lang="en-US" sz="1300" dirty="0"/>
+          </a:p>
+        </p:txBody>
+      </p:sp>
+      <p:sp>
+        <p:nvSpPr>
+          <p:cNvPr id="9" name="Text 7"/>
+          <p:cNvSpPr/>
+          <p:nvPr/>
+        </p:nvSpPr>
+        <p:spPr>
+          <a:xfrm>
+            <a:off x="804672" y="2423160"/>
+            <a:ext cx="2121408" cy="1353312"/>
+          </a:xfrm>
+          <a:prstGeom prst="rect">
+            <a:avLst/>
+          </a:prstGeom>
+          <a:noFill/>
+          <a:ln/>
+        </p:spPr>
+        <p:txBody>
+          <a:bodyPr wrap="square" lIns="0" tIns="0" rIns="0" bIns="0" rtlCol="0" anchor="t"/>
+          <a:lstStyle/>
+          <a:p>
+            <a:pPr indent="0" marL="0">
+              <a:lnSpc>
+                <a:spcPct val="92000"/>
+              </a:lnSpc>
+              <a:buNone/>
+            </a:pPr>
+            <a:r>
+              <a:rPr lang="en-US" sz="1150" dirty="0">
+                <a:solidFill>
+                  <a:srgbClr val="434A63"/>
+                </a:solidFill>
+                <a:latin typeface="Arial" pitchFamily="34" charset="0"/>
+                <a:ea typeface="Arial" pitchFamily="34" charset="-122"/>
+                <a:cs typeface="Arial" pitchFamily="34" charset="-120"/>
+              </a:rPr>
+              <a:t>Hypervisor, virtuelle Maschinen, virtuelle Netze – und ihr startet eure erste eigene VM. Das Werkzeug dafür richten wir gemeinsam ein.</a:t>
+            </a:r>
+            <a:endParaRPr lang="en-US" sz="1150" dirty="0"/>
+          </a:p>
+        </p:txBody>
+      </p:sp>
+      <p:sp>
+        <p:nvSpPr>
+          <p:cNvPr id="10" name="Shape 8"/>
+          <p:cNvSpPr/>
+          <p:nvPr/>
+        </p:nvSpPr>
+        <p:spPr>
+          <a:xfrm>
+            <a:off x="3310128" y="1975104"/>
+            <a:ext cx="2523744" cy="1920240"/>
+          </a:xfrm>
+          <a:prstGeom prst="rect">
+            <a:avLst/>
+          </a:prstGeom>
+          <a:solidFill>
+            <a:srgbClr val="F5F6FC"/>
+          </a:solidFill>
+          <a:ln/>
+        </p:spPr>
+      </p:sp>
+      <p:sp>
+        <p:nvSpPr>
+          <p:cNvPr id="11" name="Shape 9"/>
+          <p:cNvSpPr/>
+          <p:nvPr/>
+        </p:nvSpPr>
+        <p:spPr>
+          <a:xfrm>
+            <a:off x="3310128" y="1975104"/>
+            <a:ext cx="41148" cy="1920240"/>
+          </a:xfrm>
+          <a:prstGeom prst="rect">
+            <a:avLst/>
+          </a:prstGeom>
+          <a:solidFill>
+            <a:srgbClr val="3843AF"/>
+          </a:solidFill>
+          <a:ln/>
+        </p:spPr>
+      </p:sp>
+      <p:sp>
+        <p:nvSpPr>
+          <p:cNvPr id="12" name="Text 10"/>
+          <p:cNvSpPr/>
+          <p:nvPr/>
+        </p:nvSpPr>
+        <p:spPr>
+          <a:xfrm>
+            <a:off x="3547872" y="2121408"/>
+            <a:ext cx="2121408" cy="256032"/>
+          </a:xfrm>
+          <a:prstGeom prst="rect">
+            <a:avLst/>
+          </a:prstGeom>
+          <a:noFill/>
+          <a:ln/>
+        </p:spPr>
+        <p:txBody>
+          <a:bodyPr wrap="square" lIns="0" tIns="0" rIns="0" bIns="0" rtlCol="0" anchor="t"/>
+          <a:lstStyle/>
+          <a:p>
+            <a:pPr indent="0" marL="0">
+              <a:buNone/>
+            </a:pPr>
+            <a:r>
+              <a:rPr lang="en-US" sz="1300" b="1" dirty="0">
+                <a:solidFill>
+                  <a:srgbClr val="272E52"/>
+                </a:solidFill>
+                <a:latin typeface="Arial" pitchFamily="34" charset="0"/>
+                <a:ea typeface="Arial" pitchFamily="34" charset="-122"/>
+                <a:cs typeface="Arial" pitchFamily="34" charset="-120"/>
+              </a:rPr>
+              <a:t>Nichts vorbereiten</a:t>
+            </a:r>
+            <a:endParaRPr lang="en-US" sz="1300" dirty="0"/>
+          </a:p>
+        </p:txBody>
+      </p:sp>
+      <p:sp>
+        <p:nvSpPr>
+          <p:cNvPr id="13" name="Text 11"/>
+          <p:cNvSpPr/>
+          <p:nvPr/>
+        </p:nvSpPr>
+        <p:spPr>
+          <a:xfrm>
+            <a:off x="3547872" y="2423160"/>
+            <a:ext cx="2121408" cy="1353312"/>
+          </a:xfrm>
+          <a:prstGeom prst="rect">
+            <a:avLst/>
+          </a:prstGeom>
+          <a:noFill/>
+          <a:ln/>
+        </p:spPr>
+        <p:txBody>
+          <a:bodyPr wrap="square" lIns="0" tIns="0" rIns="0" bIns="0" rtlCol="0" anchor="t"/>
+          <a:lstStyle/>
+          <a:p>
+            <a:pPr indent="0" marL="0">
+              <a:lnSpc>
+                <a:spcPct val="92000"/>
+              </a:lnSpc>
+              <a:buNone/>
+            </a:pPr>
+            <a:r>
+              <a:rPr lang="en-US" sz="1150" dirty="0">
+                <a:solidFill>
+                  <a:srgbClr val="434A63"/>
+                </a:solidFill>
+                <a:latin typeface="Arial" pitchFamily="34" charset="0"/>
+                <a:ea typeface="Arial" pitchFamily="34" charset="-122"/>
+                <a:cs typeface="Arial" pitchFamily="34" charset="-120"/>
+              </a:rPr>
+              <a:t>Ihr braucht nur euren Rechner. Wer mag, liest vorab die Seite „Virtualisierung“ auf der Kursseite an – Pflicht ist das nicht.</a:t>
+            </a:r>
+            <a:endParaRPr lang="en-US" sz="1150" dirty="0"/>
+          </a:p>
+        </p:txBody>
+      </p:sp>
+      <p:sp>
+        <p:nvSpPr>
+          <p:cNvPr id="14" name="Shape 12"/>
+          <p:cNvSpPr/>
+          <p:nvPr/>
+        </p:nvSpPr>
+        <p:spPr>
+          <a:xfrm>
+            <a:off x="6053328" y="1975104"/>
+            <a:ext cx="2523744" cy="1920240"/>
+          </a:xfrm>
+          <a:prstGeom prst="rect">
+            <a:avLst/>
+          </a:prstGeom>
+          <a:solidFill>
+            <a:srgbClr val="F5F6FC"/>
+          </a:solidFill>
+          <a:ln/>
+        </p:spPr>
+      </p:sp>
+      <p:sp>
+        <p:nvSpPr>
+          <p:cNvPr id="15" name="Shape 13"/>
+          <p:cNvSpPr/>
+          <p:nvPr/>
+        </p:nvSpPr>
+        <p:spPr>
+          <a:xfrm>
+            <a:off x="6053328" y="1975104"/>
+            <a:ext cx="41148" cy="1920240"/>
+          </a:xfrm>
+          <a:prstGeom prst="rect">
+            <a:avLst/>
+          </a:prstGeom>
+          <a:solidFill>
+            <a:srgbClr val="3843AF"/>
+          </a:solidFill>
+          <a:ln/>
+        </p:spPr>
+      </p:sp>
+      <p:sp>
+        <p:nvSpPr>
+          <p:cNvPr id="16" name="Text 14"/>
+          <p:cNvSpPr/>
+          <p:nvPr/>
+        </p:nvSpPr>
+        <p:spPr>
+          <a:xfrm>
+            <a:off x="6291072" y="2121408"/>
+            <a:ext cx="2121408" cy="256032"/>
+          </a:xfrm>
+          <a:prstGeom prst="rect">
+            <a:avLst/>
+          </a:prstGeom>
+          <a:noFill/>
+          <a:ln/>
+        </p:spPr>
+        <p:txBody>
+          <a:bodyPr wrap="square" lIns="0" tIns="0" rIns="0" bIns="0" rtlCol="0" anchor="t"/>
+          <a:lstStyle/>
+          <a:p>
+            <a:pPr indent="0" marL="0">
+              <a:buNone/>
+            </a:pPr>
+            <a:r>
+              <a:rPr lang="en-US" sz="1300" b="1" dirty="0">
+                <a:solidFill>
+                  <a:srgbClr val="272E52"/>
+                </a:solidFill>
+                <a:latin typeface="Arial" pitchFamily="34" charset="0"/>
+                <a:ea typeface="Arial" pitchFamily="34" charset="-122"/>
+                <a:cs typeface="Arial" pitchFamily="34" charset="-120"/>
+              </a:rPr>
+              <a:t>Offene Rechnungen</a:t>
+            </a:r>
+            <a:endParaRPr lang="en-US" sz="1300" dirty="0"/>
+          </a:p>
+        </p:txBody>
+      </p:sp>
+      <p:sp>
+        <p:nvSpPr>
+          <p:cNvPr id="17" name="Text 15"/>
+          <p:cNvSpPr/>
+          <p:nvPr/>
+        </p:nvSpPr>
+        <p:spPr>
+          <a:xfrm>
+            <a:off x="6291072" y="2423160"/>
+            <a:ext cx="2121408" cy="1353312"/>
+          </a:xfrm>
+          <a:prstGeom prst="rect">
+            <a:avLst/>
+          </a:prstGeom>
+          <a:noFill/>
+          <a:ln/>
+        </p:spPr>
+        <p:txBody>
+          <a:bodyPr wrap="square" lIns="0" tIns="0" rIns="0" bIns="0" rtlCol="0" anchor="t"/>
+          <a:lstStyle/>
+          <a:p>
+            <a:pPr indent="0" marL="0">
+              <a:lnSpc>
+                <a:spcPct val="92000"/>
+              </a:lnSpc>
+              <a:buNone/>
+            </a:pPr>
+            <a:r>
+              <a:rPr lang="en-US" sz="1150" dirty="0">
+                <a:solidFill>
+                  <a:srgbClr val="434A63"/>
+                </a:solidFill>
+                <a:latin typeface="Arial" pitchFamily="34" charset="0"/>
+                <a:ea typeface="Arial" pitchFamily="34" charset="-122"/>
+                <a:cs typeface="Arial" pitchFamily="34" charset="-120"/>
+              </a:rPr>
+              <a:t>Wer bei den Fällen 3 und 4 geschwommen ist: Die Montags-Seiten zu Adressierung und Routing schließen die Lücke.</a:t>
+            </a:r>
+            <a:endParaRPr lang="en-US" sz="1150" dirty="0"/>
+          </a:p>
+        </p:txBody>
+      </p:sp>
+      <p:sp>
+        <p:nvSpPr>
+          <p:cNvPr id="18" name="Shape 16"/>
+          <p:cNvSpPr/>
+          <p:nvPr/>
+        </p:nvSpPr>
+        <p:spPr>
+          <a:xfrm>
+            <a:off x="566928" y="4160520"/>
+            <a:ext cx="32004" cy="256032"/>
+          </a:xfrm>
+          <a:prstGeom prst="rect">
+            <a:avLst/>
+          </a:prstGeom>
+          <a:solidFill>
+            <a:srgbClr val="3843AF"/>
+          </a:solidFill>
+          <a:ln/>
+        </p:spPr>
+      </p:sp>
+      <p:sp>
+        <p:nvSpPr>
+          <p:cNvPr id="19" name="Text 17"/>
+          <p:cNvSpPr/>
+          <p:nvPr/>
+        </p:nvSpPr>
+        <p:spPr>
+          <a:xfrm>
+            <a:off x="749808" y="4114800"/>
+            <a:ext cx="7827264" cy="402336"/>
+          </a:xfrm>
+          <a:prstGeom prst="rect">
+            <a:avLst/>
+          </a:prstGeom>
+          <a:noFill/>
+          <a:ln/>
+        </p:spPr>
+        <p:txBody>
+          <a:bodyPr wrap="square" lIns="0" tIns="0" rIns="0" bIns="0" rtlCol="0" anchor="ctr"/>
+          <a:lstStyle/>
+          <a:p>
+            <a:pPr indent="0" marL="0">
+              <a:buNone/>
+            </a:pPr>
+            <a:r>
+              <a:rPr lang="en-US" sz="1200" b="1" dirty="0">
+                <a:solidFill>
+                  <a:srgbClr val="434A63"/>
+                </a:solidFill>
+                <a:latin typeface="Arial" pitchFamily="34" charset="0"/>
+                <a:ea typeface="Arial" pitchFamily="34" charset="-122"/>
+                <a:cs typeface="Arial" pitchFamily="34" charset="-120"/>
+              </a:rPr>
+              <a:t>Nächster Termin: Montag, 7. September, 18:00 Uhr – Virtualisierung.</a:t>
+            </a:r>
+            <a:endParaRPr lang="en-US" sz="1200" dirty="0"/>
+          </a:p>
+        </p:txBody>
+      </p:sp>
+      <p:sp>
+        <p:nvSpPr>
+          <p:cNvPr id="20" name="Shape 18"/>
+          <p:cNvSpPr/>
+          <p:nvPr/>
+        </p:nvSpPr>
+        <p:spPr>
+          <a:xfrm>
+            <a:off x="566928" y="4631436"/>
+            <a:ext cx="8010144" cy="0"/>
+          </a:xfrm>
+          <a:prstGeom prst="line">
+            <a:avLst/>
+          </a:prstGeom>
+          <a:noFill/>
+          <a:ln w="9525">
+            <a:solidFill>
+              <a:srgbClr val="DFE3F0"/>
+            </a:solidFill>
+            <a:prstDash val="solid"/>
+          </a:ln>
+        </p:spPr>
+      </p:sp>
+      <p:sp>
+        <p:nvSpPr>
+          <p:cNvPr id="21" name="Text 19"/>
+          <p:cNvSpPr/>
+          <p:nvPr/>
+        </p:nvSpPr>
+        <p:spPr>
+          <a:xfrm>
+            <a:off x="566928" y="4722876"/>
+            <a:ext cx="5029200" cy="237744"/>
+          </a:xfrm>
+          <a:prstGeom prst="rect">
+            <a:avLst/>
+          </a:prstGeom>
+          <a:noFill/>
+          <a:ln/>
+        </p:spPr>
+        <p:txBody>
+          <a:bodyPr wrap="square" lIns="0" tIns="0" rIns="0" bIns="0" rtlCol="0" anchor="ctr"/>
+          <a:lstStyle/>
+          <a:p>
+            <a:pPr indent="0" marL="0">
+              <a:buNone/>
+            </a:pPr>
+            <a:r>
+              <a:rPr lang="en-US" sz="1050" spc="30" kern="0" dirty="0">
+                <a:solidFill>
+                  <a:srgbClr val="5C6377"/>
+                </a:solidFill>
+                <a:latin typeface="Arial" pitchFamily="34" charset="0"/>
+                <a:ea typeface="Arial" pitchFamily="34" charset="-122"/>
+                <a:cs typeface="Arial" pitchFamily="34" charset="-120"/>
+              </a:rPr>
+              <a:t>Abschluss</a:t>
+            </a:r>
+            <a:endParaRPr lang="en-US" sz="1050" dirty="0"/>
+          </a:p>
+        </p:txBody>
+      </p:sp>
+      <p:sp>
+        <p:nvSpPr>
+          <p:cNvPr id="22" name="Text 20"/>
+          <p:cNvSpPr/>
+          <p:nvPr/>
+        </p:nvSpPr>
+        <p:spPr>
+          <a:xfrm>
+            <a:off x="8028432" y="4722876"/>
+            <a:ext cx="548640" cy="237744"/>
+          </a:xfrm>
+          <a:prstGeom prst="rect">
+            <a:avLst/>
+          </a:prstGeom>
+          <a:noFill/>
+          <a:ln/>
+        </p:spPr>
+        <p:txBody>
+          <a:bodyPr wrap="square" lIns="0" tIns="0" rIns="0" bIns="0" rtlCol="0" anchor="ctr"/>
+          <a:lstStyle/>
+          <a:p>
+            <a:pPr algn="r" indent="0" marL="0">
+              <a:buNone/>
+            </a:pPr>
+            <a:r>
+              <a:rPr lang="en-US" sz="1050" dirty="0">
+                <a:solidFill>
+                  <a:srgbClr val="5C6377"/>
+                </a:solidFill>
+                <a:latin typeface="Arial" pitchFamily="34" charset="0"/>
+                <a:ea typeface="Arial" pitchFamily="34" charset="-122"/>
+                <a:cs typeface="Arial" pitchFamily="34" charset="-120"/>
+              </a:rPr>
+              <a:t>31/31</a:t>
+            </a:r>
+            <a:endParaRPr lang="en-US" sz="1050" dirty="0"/>
+          </a:p>
+        </p:txBody>
+      </p:sp>
+    </p:spTree>
+  </p:cSld>
+  <p:clrMapOvr>
+    <a:masterClrMapping/>
+  </p:clrMapOvr>
+</p:sld>
+</file>
+
+<file path=ppt/slides/slide37.xml><?xml version="1.0" encoding="utf-8"?>
+<p:sld xmlns:a="http://schemas.openxmlformats.org/drawingml/2006/main" xmlns:r="http://schemas.openxmlformats.org/officeDocument/2006/relationships" xmlns:p="http://schemas.openxmlformats.org/presentationml/2006/main">
+  <p:cSld name="Slide 37">
     <p:bg>
       <p:bgPr>
         <a:solidFill>
@@ -16425,7 +16769,7 @@
                 <a:ea typeface="Arial" pitchFamily="34" charset="-122"/>
                 <a:cs typeface="Arial" pitchFamily="34" charset="-120"/>
               </a:rPr>
-              <a:t>3/30</a:t>
+              <a:t>3/31</a:t>
             </a:r>
             <a:endParaRPr lang="en-US" sz="1050" dirty="0"/>
           </a:p>
@@ -16948,7 +17292,7 @@
                 <a:ea typeface="Arial" pitchFamily="34" charset="-122"/>
                 <a:cs typeface="Arial" pitchFamily="34" charset="-120"/>
               </a:rPr>
-              <a:t>4/30</a:t>
+              <a:t>4/31</a:t>
             </a:r>
             <a:endParaRPr lang="en-US" sz="1050" dirty="0"/>
           </a:p>
@@ -17262,7 +17606,7 @@
                 <a:ea typeface="Arial" pitchFamily="34" charset="-122"/>
                 <a:cs typeface="Arial" pitchFamily="34" charset="-120"/>
               </a:rPr>
-              <a:t>5/30</a:t>
+              <a:t>5/31</a:t>
             </a:r>
             <a:endParaRPr lang="en-US" sz="1050" dirty="0"/>
           </a:p>
@@ -17576,7 +17920,7 @@
                 <a:ea typeface="Arial" pitchFamily="34" charset="-122"/>
                 <a:cs typeface="Arial" pitchFamily="34" charset="-120"/>
               </a:rPr>
-              <a:t>6/30</a:t>
+              <a:t>6/31</a:t>
             </a:r>
             <a:endParaRPr lang="en-US" sz="1050" dirty="0"/>
           </a:p>
@@ -17890,7 +18234,7 @@
                 <a:ea typeface="Arial" pitchFamily="34" charset="-122"/>
                 <a:cs typeface="Arial" pitchFamily="34" charset="-120"/>
               </a:rPr>
-              <a:t>7/30</a:t>
+              <a:t>7/31</a:t>
             </a:r>
             <a:endParaRPr lang="en-US" sz="1050" dirty="0"/>
           </a:p>
